--- a/Modeule 4 - AI Builder Business Logic and Intelligent.pptx
+++ b/Modeule 4 - AI Builder Business Logic and Intelligent.pptx
@@ -7,24 +7,25 @@
     <p:sldMasterId id="2147483684" r:id="rId3"/>
   </p:sldMasterIdLst>
   <p:notesMasterIdLst>
-    <p:notesMasterId r:id="rId19"/>
+    <p:notesMasterId r:id="rId20"/>
   </p:notesMasterIdLst>
   <p:sldIdLst>
     <p:sldId id="2147479557" r:id="rId4"/>
     <p:sldId id="256" r:id="rId5"/>
     <p:sldId id="258" r:id="rId6"/>
     <p:sldId id="259" r:id="rId7"/>
-    <p:sldId id="260" r:id="rId8"/>
-    <p:sldId id="261" r:id="rId9"/>
-    <p:sldId id="262" r:id="rId10"/>
-    <p:sldId id="263" r:id="rId11"/>
-    <p:sldId id="264" r:id="rId12"/>
-    <p:sldId id="265" r:id="rId13"/>
-    <p:sldId id="267" r:id="rId14"/>
-    <p:sldId id="268" r:id="rId15"/>
-    <p:sldId id="266" r:id="rId16"/>
-    <p:sldId id="2147479601" r:id="rId17"/>
-    <p:sldId id="2142533481" r:id="rId18"/>
+    <p:sldId id="2147479602" r:id="rId8"/>
+    <p:sldId id="260" r:id="rId9"/>
+    <p:sldId id="261" r:id="rId10"/>
+    <p:sldId id="262" r:id="rId11"/>
+    <p:sldId id="263" r:id="rId12"/>
+    <p:sldId id="264" r:id="rId13"/>
+    <p:sldId id="265" r:id="rId14"/>
+    <p:sldId id="267" r:id="rId15"/>
+    <p:sldId id="268" r:id="rId16"/>
+    <p:sldId id="266" r:id="rId17"/>
+    <p:sldId id="2147479601" r:id="rId18"/>
+    <p:sldId id="2142533481" r:id="rId19"/>
   </p:sldIdLst>
   <p:sldSz cx="12192000" cy="6858000"/>
   <p:notesSz cx="6858000" cy="9144000"/>
@@ -134,8 +135,7 @@
 <file path=ppt/revisionInfo.xml><?xml version="1.0" encoding="utf-8"?>
 <p1510:revInfo xmlns:a="http://schemas.openxmlformats.org/drawingml/2006/main" xmlns:r="http://schemas.openxmlformats.org/officeDocument/2006/relationships" xmlns:p1510="http://schemas.microsoft.com/office/powerpoint/2015/10/main">
   <p1510:revLst>
-    <p1510:client id="{35087783-BA59-4BF9-AF06-0D08442361EA}" v="6" dt="2026-10-23T05:36:56.838"/>
-    <p1510:client id="{9DF06EC0-6773-4754-B5CF-3A86373E55DF}" v="92" dt="2026-10-22T17:12:19.706"/>
+    <p1510:client id="{35087783-BA59-4BF9-AF06-0D08442361EA}" v="8" dt="2026-10-29T16:18:11.418"/>
   </p1510:revLst>
 </p1510:revInfo>
 </file>
@@ -568,14 +568,6 @@
           <pc:docMk/>
           <pc:sldMk cId="2979084665" sldId="2147479593"/>
         </pc:sldMkLst>
-        <pc:spChg chg="mod">
-          <ac:chgData name="Jenkins NS" userId="8bdba4d2-1367-40cf-ad35-f59b31261896" providerId="ADAL" clId="{9DF06EC0-6773-4754-B5CF-3A86373E55DF}" dt="2026-10-22T17:16:18.362" v="499" actId="20577"/>
-          <ac:spMkLst>
-            <pc:docMk/>
-            <pc:sldMk cId="2979084665" sldId="2147479593"/>
-            <ac:spMk id="3" creationId="{E1E21D66-9B9B-D583-A6D9-39E93A43781F}"/>
-          </ac:spMkLst>
-        </pc:spChg>
       </pc:sldChg>
       <pc:sldChg chg="add setBg">
         <pc:chgData name="Jenkins NS" userId="8bdba4d2-1367-40cf-ad35-f59b31261896" providerId="ADAL" clId="{9DF06EC0-6773-4754-B5CF-3A86373E55DF}" dt="2026-10-21T22:16:56.748" v="401"/>
@@ -689,22 +681,6 @@
           <pc:docMk/>
           <pc:sldMk cId="1525641040" sldId="2147479603"/>
         </pc:sldMkLst>
-        <pc:spChg chg="mod">
-          <ac:chgData name="Jenkins NS" userId="8bdba4d2-1367-40cf-ad35-f59b31261896" providerId="ADAL" clId="{9DF06EC0-6773-4754-B5CF-3A86373E55DF}" dt="2026-10-22T17:11:59.113" v="483" actId="20577"/>
-          <ac:spMkLst>
-            <pc:docMk/>
-            <pc:sldMk cId="1525641040" sldId="2147479603"/>
-            <ac:spMk id="3" creationId="{553923D6-D6BD-2A1A-B726-3087B6D885BC}"/>
-          </ac:spMkLst>
-        </pc:spChg>
-        <pc:spChg chg="mod">
-          <ac:chgData name="Jenkins NS" userId="8bdba4d2-1367-40cf-ad35-f59b31261896" providerId="ADAL" clId="{9DF06EC0-6773-4754-B5CF-3A86373E55DF}" dt="2026-10-22T17:12:25.880" v="489" actId="20577"/>
-          <ac:spMkLst>
-            <pc:docMk/>
-            <pc:sldMk cId="1525641040" sldId="2147479603"/>
-            <ac:spMk id="4" creationId="{5D97F56A-A0BE-BE10-5B49-DFB6A23B5F18}"/>
-          </ac:spMkLst>
-        </pc:spChg>
       </pc:sldChg>
       <pc:sldChg chg="add del setBg">
         <pc:chgData name="Jenkins NS" userId="8bdba4d2-1367-40cf-ad35-f59b31261896" providerId="ADAL" clId="{9DF06EC0-6773-4754-B5CF-3A86373E55DF}" dt="2026-10-22T17:11:52.663" v="473"/>
@@ -1079,15 +1055,6 @@
               <ac:picMk id="11" creationId="{8A5D0B54-3E0F-E277-0472-C5E542E53F7F}"/>
             </ac:picMkLst>
           </pc:picChg>
-          <pc:picChg chg="add del mod">
-            <ac:chgData name="Jenkins NS" userId="8bdba4d2-1367-40cf-ad35-f59b31261896" providerId="ADAL" clId="{9DF06EC0-6773-4754-B5CF-3A86373E55DF}" dt="2026-10-22T17:10:37.795" v="467" actId="478"/>
-            <ac:picMkLst>
-              <pc:docMk/>
-              <pc:sldMasterMk cId="975404246" sldId="2147483648"/>
-              <pc:sldLayoutMk cId="3241650075" sldId="2147483672"/>
-              <ac:picMk id="13" creationId="{3301086E-F595-9F37-140F-1279F2C885C8}"/>
-            </ac:picMkLst>
-          </pc:picChg>
           <pc:picChg chg="add mod ord">
             <ac:chgData name="Jenkins NS" userId="8bdba4d2-1367-40cf-ad35-f59b31261896" providerId="ADAL" clId="{9DF06EC0-6773-4754-B5CF-3A86373E55DF}" dt="2026-10-21T19:49:27.186" v="299" actId="167"/>
             <ac:picMkLst>
@@ -1171,7 +1138,7 @@
   <pc:docChgLst>
     <pc:chgData name="Jenkins NS" userId="8bdba4d2-1367-40cf-ad35-f59b31261896" providerId="ADAL" clId="{35087783-BA59-4BF9-AF06-0D08442361EA}"/>
     <pc:docChg chg="undo custSel addSld delSld modSld delMainMaster">
-      <pc:chgData name="Jenkins NS" userId="8bdba4d2-1367-40cf-ad35-f59b31261896" providerId="ADAL" clId="{35087783-BA59-4BF9-AF06-0D08442361EA}" dt="2026-10-23T05:37:00.241" v="45" actId="478"/>
+      <pc:chgData name="Jenkins NS" userId="8bdba4d2-1367-40cf-ad35-f59b31261896" providerId="ADAL" clId="{35087783-BA59-4BF9-AF06-0D08442361EA}" dt="2026-10-29T16:18:11.418" v="53"/>
       <pc:docMkLst>
         <pc:docMk/>
       </pc:docMkLst>
@@ -1181,14 +1148,6 @@
           <pc:docMk/>
           <pc:sldMk cId="0" sldId="256"/>
         </pc:sldMkLst>
-        <pc:spChg chg="del">
-          <ac:chgData name="Jenkins NS" userId="8bdba4d2-1367-40cf-ad35-f59b31261896" providerId="ADAL" clId="{35087783-BA59-4BF9-AF06-0D08442361EA}" dt="2026-10-23T05:34:19.614" v="37" actId="478"/>
-          <ac:spMkLst>
-            <pc:docMk/>
-            <pc:sldMk cId="0" sldId="256"/>
-            <ac:spMk id="5" creationId="{00000000-0000-0000-0000-000000000000}"/>
-          </ac:spMkLst>
-        </pc:spChg>
       </pc:sldChg>
       <pc:sldChg chg="add">
         <pc:chgData name="Jenkins NS" userId="8bdba4d2-1367-40cf-ad35-f59b31261896" providerId="ADAL" clId="{35087783-BA59-4BF9-AF06-0D08442361EA}" dt="2026-10-23T05:35:11.336" v="38"/>
@@ -1197,12 +1156,20 @@
           <pc:sldMk cId="0" sldId="258"/>
         </pc:sldMkLst>
       </pc:sldChg>
-      <pc:sldChg chg="add">
-        <pc:chgData name="Jenkins NS" userId="8bdba4d2-1367-40cf-ad35-f59b31261896" providerId="ADAL" clId="{35087783-BA59-4BF9-AF06-0D08442361EA}" dt="2026-10-23T05:35:11.336" v="38"/>
+      <pc:sldChg chg="addSp delSp add mod">
+        <pc:chgData name="Jenkins NS" userId="8bdba4d2-1367-40cf-ad35-f59b31261896" providerId="ADAL" clId="{35087783-BA59-4BF9-AF06-0D08442361EA}" dt="2026-10-29T16:17:41.521" v="47" actId="22"/>
         <pc:sldMkLst>
           <pc:docMk/>
           <pc:sldMk cId="0" sldId="259"/>
         </pc:sldMkLst>
+        <pc:picChg chg="add del">
+          <ac:chgData name="Jenkins NS" userId="8bdba4d2-1367-40cf-ad35-f59b31261896" providerId="ADAL" clId="{35087783-BA59-4BF9-AF06-0D08442361EA}" dt="2026-10-29T16:17:41.521" v="47" actId="22"/>
+          <ac:picMkLst>
+            <pc:docMk/>
+            <pc:sldMk cId="0" sldId="259"/>
+            <ac:picMk id="17" creationId="{02FD7C88-EDA8-FBE8-6AD9-2BF1C7FE9564}"/>
+          </ac:picMkLst>
+        </pc:picChg>
       </pc:sldChg>
       <pc:sldChg chg="add">
         <pc:chgData name="Jenkins NS" userId="8bdba4d2-1367-40cf-ad35-f59b31261896" providerId="ADAL" clId="{35087783-BA59-4BF9-AF06-0D08442361EA}" dt="2026-10-23T05:35:11.336" v="38"/>
@@ -1276,222 +1243,149 @@
           <pc:docMk/>
           <pc:sldMk cId="0" sldId="266"/>
         </pc:sldMkLst>
+      </pc:sldChg>
+      <pc:sldChg chg="add">
+        <pc:chgData name="Jenkins NS" userId="8bdba4d2-1367-40cf-ad35-f59b31261896" providerId="ADAL" clId="{35087783-BA59-4BF9-AF06-0D08442361EA}" dt="2026-10-23T05:35:56.582" v="40"/>
+        <pc:sldMkLst>
+          <pc:docMk/>
+          <pc:sldMk cId="0" sldId="267"/>
+        </pc:sldMkLst>
+      </pc:sldChg>
+      <pc:sldChg chg="add">
+        <pc:chgData name="Jenkins NS" userId="8bdba4d2-1367-40cf-ad35-f59b31261896" providerId="ADAL" clId="{35087783-BA59-4BF9-AF06-0D08442361EA}" dt="2026-10-23T05:35:56.582" v="40"/>
+        <pc:sldMkLst>
+          <pc:docMk/>
+          <pc:sldMk cId="0" sldId="268"/>
+        </pc:sldMkLst>
+      </pc:sldChg>
+      <pc:sldChg chg="del">
+        <pc:chgData name="Jenkins NS" userId="8bdba4d2-1367-40cf-ad35-f59b31261896" providerId="ADAL" clId="{35087783-BA59-4BF9-AF06-0D08442361EA}" dt="2026-10-22T20:54:52.392" v="0" actId="47"/>
+        <pc:sldMkLst>
+          <pc:docMk/>
+          <pc:sldMk cId="2497367714" sldId="2044"/>
+        </pc:sldMkLst>
+      </pc:sldChg>
+      <pc:sldChg chg="del">
+        <pc:chgData name="Jenkins NS" userId="8bdba4d2-1367-40cf-ad35-f59b31261896" providerId="ADAL" clId="{35087783-BA59-4BF9-AF06-0D08442361EA}" dt="2026-10-22T20:54:52.392" v="0" actId="47"/>
+        <pc:sldMkLst>
+          <pc:docMk/>
+          <pc:sldMk cId="3099915628" sldId="2045"/>
+        </pc:sldMkLst>
+      </pc:sldChg>
+      <pc:sldChg chg="del">
+        <pc:chgData name="Jenkins NS" userId="8bdba4d2-1367-40cf-ad35-f59b31261896" providerId="ADAL" clId="{35087783-BA59-4BF9-AF06-0D08442361EA}" dt="2026-10-22T20:54:52.392" v="0" actId="47"/>
+        <pc:sldMkLst>
+          <pc:docMk/>
+          <pc:sldMk cId="1470740852" sldId="2047"/>
+        </pc:sldMkLst>
+      </pc:sldChg>
+      <pc:sldChg chg="del">
+        <pc:chgData name="Jenkins NS" userId="8bdba4d2-1367-40cf-ad35-f59b31261896" providerId="ADAL" clId="{35087783-BA59-4BF9-AF06-0D08442361EA}" dt="2026-10-22T20:54:52.392" v="0" actId="47"/>
+        <pc:sldMkLst>
+          <pc:docMk/>
+          <pc:sldMk cId="2010521932" sldId="2048"/>
+        </pc:sldMkLst>
+      </pc:sldChg>
+      <pc:sldChg chg="del">
+        <pc:chgData name="Jenkins NS" userId="8bdba4d2-1367-40cf-ad35-f59b31261896" providerId="ADAL" clId="{35087783-BA59-4BF9-AF06-0D08442361EA}" dt="2026-10-22T20:54:52.392" v="0" actId="47"/>
+        <pc:sldMkLst>
+          <pc:docMk/>
+          <pc:sldMk cId="254325681" sldId="10819"/>
+        </pc:sldMkLst>
+      </pc:sldChg>
+      <pc:sldChg chg="del">
+        <pc:chgData name="Jenkins NS" userId="8bdba4d2-1367-40cf-ad35-f59b31261896" providerId="ADAL" clId="{35087783-BA59-4BF9-AF06-0D08442361EA}" dt="2026-10-22T20:54:52.392" v="0" actId="47"/>
+        <pc:sldMkLst>
+          <pc:docMk/>
+          <pc:sldMk cId="220853581" sldId="2076136495"/>
+        </pc:sldMkLst>
+      </pc:sldChg>
+      <pc:sldChg chg="del">
+        <pc:chgData name="Jenkins NS" userId="8bdba4d2-1367-40cf-ad35-f59b31261896" providerId="ADAL" clId="{35087783-BA59-4BF9-AF06-0D08442361EA}" dt="2026-10-22T20:54:52.392" v="0" actId="47"/>
+        <pc:sldMkLst>
+          <pc:docMk/>
+          <pc:sldMk cId="3937804750" sldId="2076136496"/>
+        </pc:sldMkLst>
+      </pc:sldChg>
+      <pc:sldChg chg="del">
+        <pc:chgData name="Jenkins NS" userId="8bdba4d2-1367-40cf-ad35-f59b31261896" providerId="ADAL" clId="{35087783-BA59-4BF9-AF06-0D08442361EA}" dt="2026-10-22T20:54:52.392" v="0" actId="47"/>
+        <pc:sldMkLst>
+          <pc:docMk/>
+          <pc:sldMk cId="0" sldId="2147479594"/>
+        </pc:sldMkLst>
+      </pc:sldChg>
+      <pc:sldChg chg="addSp delSp modSp del mod">
+        <pc:chgData name="Jenkins NS" userId="8bdba4d2-1367-40cf-ad35-f59b31261896" providerId="ADAL" clId="{35087783-BA59-4BF9-AF06-0D08442361EA}" dt="2026-10-22T20:56:24.818" v="35" actId="47"/>
+        <pc:sldMkLst>
+          <pc:docMk/>
+          <pc:sldMk cId="0" sldId="2147479595"/>
+        </pc:sldMkLst>
+      </pc:sldChg>
+      <pc:sldChg chg="addSp delSp modSp del mod">
+        <pc:chgData name="Jenkins NS" userId="8bdba4d2-1367-40cf-ad35-f59b31261896" providerId="ADAL" clId="{35087783-BA59-4BF9-AF06-0D08442361EA}" dt="2026-10-22T20:56:24.818" v="35" actId="47"/>
+        <pc:sldMkLst>
+          <pc:docMk/>
+          <pc:sldMk cId="0" sldId="2147479596"/>
+        </pc:sldMkLst>
+      </pc:sldChg>
+      <pc:sldChg chg="addSp delSp modSp del mod">
+        <pc:chgData name="Jenkins NS" userId="8bdba4d2-1367-40cf-ad35-f59b31261896" providerId="ADAL" clId="{35087783-BA59-4BF9-AF06-0D08442361EA}" dt="2026-10-22T20:56:24.818" v="35" actId="47"/>
+        <pc:sldMkLst>
+          <pc:docMk/>
+          <pc:sldMk cId="0" sldId="2147479597"/>
+        </pc:sldMkLst>
+      </pc:sldChg>
+      <pc:sldChg chg="del">
+        <pc:chgData name="Jenkins NS" userId="8bdba4d2-1367-40cf-ad35-f59b31261896" providerId="ADAL" clId="{35087783-BA59-4BF9-AF06-0D08442361EA}" dt="2026-10-22T20:54:52.392" v="0" actId="47"/>
+        <pc:sldMkLst>
+          <pc:docMk/>
+          <pc:sldMk cId="2017300280" sldId="2147479599"/>
+        </pc:sldMkLst>
+      </pc:sldChg>
+      <pc:sldChg chg="add del">
+        <pc:chgData name="Jenkins NS" userId="8bdba4d2-1367-40cf-ad35-f59b31261896" providerId="ADAL" clId="{35087783-BA59-4BF9-AF06-0D08442361EA}" dt="2026-10-23T05:35:15.489" v="39" actId="47"/>
+        <pc:sldMkLst>
+          <pc:docMk/>
+          <pc:sldMk cId="3382622447" sldId="2147479600"/>
+        </pc:sldMkLst>
+      </pc:sldChg>
+      <pc:sldChg chg="add del">
+        <pc:chgData name="Jenkins NS" userId="8bdba4d2-1367-40cf-ad35-f59b31261896" providerId="ADAL" clId="{35087783-BA59-4BF9-AF06-0D08442361EA}" dt="2026-10-22T20:56:20.943" v="34" actId="47"/>
+        <pc:sldMkLst>
+          <pc:docMk/>
+          <pc:sldMk cId="703889543" sldId="2147479601"/>
+        </pc:sldMkLst>
+      </pc:sldChg>
+      <pc:sldChg chg="addSp delSp modSp new mod">
+        <pc:chgData name="Jenkins NS" userId="8bdba4d2-1367-40cf-ad35-f59b31261896" providerId="ADAL" clId="{35087783-BA59-4BF9-AF06-0D08442361EA}" dt="2026-10-29T16:18:11.418" v="53"/>
+        <pc:sldMkLst>
+          <pc:docMk/>
+          <pc:sldMk cId="1180975732" sldId="2147479602"/>
+        </pc:sldMkLst>
         <pc:spChg chg="del">
-          <ac:chgData name="Jenkins NS" userId="8bdba4d2-1367-40cf-ad35-f59b31261896" providerId="ADAL" clId="{35087783-BA59-4BF9-AF06-0D08442361EA}" dt="2026-10-23T05:37:00.241" v="45" actId="478"/>
+          <ac:chgData name="Jenkins NS" userId="8bdba4d2-1367-40cf-ad35-f59b31261896" providerId="ADAL" clId="{35087783-BA59-4BF9-AF06-0D08442361EA}" dt="2026-10-29T16:17:49.160" v="50" actId="478"/>
           <ac:spMkLst>
             <pc:docMk/>
-            <pc:sldMk cId="0" sldId="266"/>
-            <ac:spMk id="5" creationId="{00000000-0000-0000-0000-000000000000}"/>
+            <pc:sldMk cId="1180975732" sldId="2147479602"/>
+            <ac:spMk id="2" creationId="{B2357A66-9BF1-1646-4BA7-18AB0FABB786}"/>
           </ac:spMkLst>
         </pc:spChg>
-      </pc:sldChg>
-      <pc:sldChg chg="add">
-        <pc:chgData name="Jenkins NS" userId="8bdba4d2-1367-40cf-ad35-f59b31261896" providerId="ADAL" clId="{35087783-BA59-4BF9-AF06-0D08442361EA}" dt="2026-10-23T05:35:56.582" v="40"/>
-        <pc:sldMkLst>
-          <pc:docMk/>
-          <pc:sldMk cId="0" sldId="267"/>
-        </pc:sldMkLst>
-      </pc:sldChg>
-      <pc:sldChg chg="add">
-        <pc:chgData name="Jenkins NS" userId="8bdba4d2-1367-40cf-ad35-f59b31261896" providerId="ADAL" clId="{35087783-BA59-4BF9-AF06-0D08442361EA}" dt="2026-10-23T05:35:56.582" v="40"/>
-        <pc:sldMkLst>
-          <pc:docMk/>
-          <pc:sldMk cId="0" sldId="268"/>
-        </pc:sldMkLst>
-      </pc:sldChg>
-      <pc:sldChg chg="del">
-        <pc:chgData name="Jenkins NS" userId="8bdba4d2-1367-40cf-ad35-f59b31261896" providerId="ADAL" clId="{35087783-BA59-4BF9-AF06-0D08442361EA}" dt="2026-10-22T20:54:52.392" v="0" actId="47"/>
-        <pc:sldMkLst>
-          <pc:docMk/>
-          <pc:sldMk cId="2497367714" sldId="2044"/>
-        </pc:sldMkLst>
-      </pc:sldChg>
-      <pc:sldChg chg="del">
-        <pc:chgData name="Jenkins NS" userId="8bdba4d2-1367-40cf-ad35-f59b31261896" providerId="ADAL" clId="{35087783-BA59-4BF9-AF06-0D08442361EA}" dt="2026-10-22T20:54:52.392" v="0" actId="47"/>
-        <pc:sldMkLst>
-          <pc:docMk/>
-          <pc:sldMk cId="3099915628" sldId="2045"/>
-        </pc:sldMkLst>
-      </pc:sldChg>
-      <pc:sldChg chg="del">
-        <pc:chgData name="Jenkins NS" userId="8bdba4d2-1367-40cf-ad35-f59b31261896" providerId="ADAL" clId="{35087783-BA59-4BF9-AF06-0D08442361EA}" dt="2026-10-22T20:54:52.392" v="0" actId="47"/>
-        <pc:sldMkLst>
-          <pc:docMk/>
-          <pc:sldMk cId="1470740852" sldId="2047"/>
-        </pc:sldMkLst>
-      </pc:sldChg>
-      <pc:sldChg chg="del">
-        <pc:chgData name="Jenkins NS" userId="8bdba4d2-1367-40cf-ad35-f59b31261896" providerId="ADAL" clId="{35087783-BA59-4BF9-AF06-0D08442361EA}" dt="2026-10-22T20:54:52.392" v="0" actId="47"/>
-        <pc:sldMkLst>
-          <pc:docMk/>
-          <pc:sldMk cId="2010521932" sldId="2048"/>
-        </pc:sldMkLst>
-      </pc:sldChg>
-      <pc:sldChg chg="del">
-        <pc:chgData name="Jenkins NS" userId="8bdba4d2-1367-40cf-ad35-f59b31261896" providerId="ADAL" clId="{35087783-BA59-4BF9-AF06-0D08442361EA}" dt="2026-10-22T20:54:52.392" v="0" actId="47"/>
-        <pc:sldMkLst>
-          <pc:docMk/>
-          <pc:sldMk cId="254325681" sldId="10819"/>
-        </pc:sldMkLst>
-      </pc:sldChg>
-      <pc:sldChg chg="del">
-        <pc:chgData name="Jenkins NS" userId="8bdba4d2-1367-40cf-ad35-f59b31261896" providerId="ADAL" clId="{35087783-BA59-4BF9-AF06-0D08442361EA}" dt="2026-10-22T20:54:52.392" v="0" actId="47"/>
-        <pc:sldMkLst>
-          <pc:docMk/>
-          <pc:sldMk cId="220853581" sldId="2076136495"/>
-        </pc:sldMkLst>
-      </pc:sldChg>
-      <pc:sldChg chg="del">
-        <pc:chgData name="Jenkins NS" userId="8bdba4d2-1367-40cf-ad35-f59b31261896" providerId="ADAL" clId="{35087783-BA59-4BF9-AF06-0D08442361EA}" dt="2026-10-22T20:54:52.392" v="0" actId="47"/>
-        <pc:sldMkLst>
-          <pc:docMk/>
-          <pc:sldMk cId="3937804750" sldId="2076136496"/>
-        </pc:sldMkLst>
-      </pc:sldChg>
-      <pc:sldChg chg="del">
-        <pc:chgData name="Jenkins NS" userId="8bdba4d2-1367-40cf-ad35-f59b31261896" providerId="ADAL" clId="{35087783-BA59-4BF9-AF06-0D08442361EA}" dt="2026-10-22T20:54:52.392" v="0" actId="47"/>
-        <pc:sldMkLst>
-          <pc:docMk/>
-          <pc:sldMk cId="0" sldId="2147479594"/>
-        </pc:sldMkLst>
-      </pc:sldChg>
-      <pc:sldChg chg="addSp delSp modSp del mod">
-        <pc:chgData name="Jenkins NS" userId="8bdba4d2-1367-40cf-ad35-f59b31261896" providerId="ADAL" clId="{35087783-BA59-4BF9-AF06-0D08442361EA}" dt="2026-10-22T20:56:24.818" v="35" actId="47"/>
-        <pc:sldMkLst>
-          <pc:docMk/>
-          <pc:sldMk cId="0" sldId="2147479595"/>
-        </pc:sldMkLst>
-        <pc:spChg chg="add del">
-          <ac:chgData name="Jenkins NS" userId="8bdba4d2-1367-40cf-ad35-f59b31261896" providerId="ADAL" clId="{35087783-BA59-4BF9-AF06-0D08442361EA}" dt="2026-10-22T20:56:18.364" v="28" actId="478"/>
+        <pc:spChg chg="del">
+          <ac:chgData name="Jenkins NS" userId="8bdba4d2-1367-40cf-ad35-f59b31261896" providerId="ADAL" clId="{35087783-BA59-4BF9-AF06-0D08442361EA}" dt="2026-10-29T16:17:46.412" v="49" actId="478"/>
           <ac:spMkLst>
             <pc:docMk/>
-            <pc:sldMk cId="0" sldId="2147479595"/>
-            <ac:spMk id="2" creationId="{00000000-0000-0000-0000-000000000000}"/>
+            <pc:sldMk cId="1180975732" sldId="2147479602"/>
+            <ac:spMk id="3" creationId="{C38A323C-D964-16F6-2EB2-CFF7F4F8A5D8}"/>
           </ac:spMkLst>
         </pc:spChg>
-        <pc:spChg chg="add del">
-          <ac:chgData name="Jenkins NS" userId="8bdba4d2-1367-40cf-ad35-f59b31261896" providerId="ADAL" clId="{35087783-BA59-4BF9-AF06-0D08442361EA}" dt="2026-10-22T20:56:19.772" v="32" actId="478"/>
-          <ac:spMkLst>
+        <pc:picChg chg="add mod">
+          <ac:chgData name="Jenkins NS" userId="8bdba4d2-1367-40cf-ad35-f59b31261896" providerId="ADAL" clId="{35087783-BA59-4BF9-AF06-0D08442361EA}" dt="2026-10-29T16:18:11.418" v="53"/>
+          <ac:picMkLst>
             <pc:docMk/>
-            <pc:sldMk cId="0" sldId="2147479595"/>
-            <ac:spMk id="3" creationId="{00000000-0000-0000-0000-000000000000}"/>
-          </ac:spMkLst>
-        </pc:spChg>
-        <pc:spChg chg="add del">
-          <ac:chgData name="Jenkins NS" userId="8bdba4d2-1367-40cf-ad35-f59b31261896" providerId="ADAL" clId="{35087783-BA59-4BF9-AF06-0D08442361EA}" dt="2026-10-22T20:56:20.208" v="33" actId="478"/>
-          <ac:spMkLst>
-            <pc:docMk/>
-            <pc:sldMk cId="0" sldId="2147479595"/>
-            <ac:spMk id="4" creationId="{00000000-0000-0000-0000-000000000000}"/>
-          </ac:spMkLst>
-        </pc:spChg>
-        <pc:spChg chg="mod">
-          <ac:chgData name="Jenkins NS" userId="8bdba4d2-1367-40cf-ad35-f59b31261896" providerId="ADAL" clId="{35087783-BA59-4BF9-AF06-0D08442361EA}" dt="2026-10-22T20:56:18.599" v="29" actId="14100"/>
-          <ac:spMkLst>
-            <pc:docMk/>
-            <pc:sldMk cId="0" sldId="2147479595"/>
-            <ac:spMk id="5" creationId="{00000000-0000-0000-0000-000000000000}"/>
-          </ac:spMkLst>
-        </pc:spChg>
-      </pc:sldChg>
-      <pc:sldChg chg="addSp delSp modSp del mod">
-        <pc:chgData name="Jenkins NS" userId="8bdba4d2-1367-40cf-ad35-f59b31261896" providerId="ADAL" clId="{35087783-BA59-4BF9-AF06-0D08442361EA}" dt="2026-10-22T20:56:24.818" v="35" actId="47"/>
-        <pc:sldMkLst>
-          <pc:docMk/>
-          <pc:sldMk cId="0" sldId="2147479596"/>
-        </pc:sldMkLst>
-        <pc:spChg chg="add del">
-          <ac:chgData name="Jenkins NS" userId="8bdba4d2-1367-40cf-ad35-f59b31261896" providerId="ADAL" clId="{35087783-BA59-4BF9-AF06-0D08442361EA}" dt="2026-10-22T20:56:17.932" v="26" actId="478"/>
-          <ac:spMkLst>
-            <pc:docMk/>
-            <pc:sldMk cId="0" sldId="2147479596"/>
-            <ac:spMk id="2" creationId="{00000000-0000-0000-0000-000000000000}"/>
-          </ac:spMkLst>
-        </pc:spChg>
-        <pc:spChg chg="add del">
-          <ac:chgData name="Jenkins NS" userId="8bdba4d2-1367-40cf-ad35-f59b31261896" providerId="ADAL" clId="{35087783-BA59-4BF9-AF06-0D08442361EA}" dt="2026-10-22T20:56:18.986" v="30" actId="478"/>
-          <ac:spMkLst>
-            <pc:docMk/>
-            <pc:sldMk cId="0" sldId="2147479596"/>
-            <ac:spMk id="3" creationId="{00000000-0000-0000-0000-000000000000}"/>
-          </ac:spMkLst>
-        </pc:spChg>
-        <pc:spChg chg="add del">
-          <ac:chgData name="Jenkins NS" userId="8bdba4d2-1367-40cf-ad35-f59b31261896" providerId="ADAL" clId="{35087783-BA59-4BF9-AF06-0D08442361EA}" dt="2026-10-22T20:56:19.405" v="31" actId="478"/>
-          <ac:spMkLst>
-            <pc:docMk/>
-            <pc:sldMk cId="0" sldId="2147479596"/>
-            <ac:spMk id="4" creationId="{00000000-0000-0000-0000-000000000000}"/>
-          </ac:spMkLst>
-        </pc:spChg>
-        <pc:spChg chg="mod">
-          <ac:chgData name="Jenkins NS" userId="8bdba4d2-1367-40cf-ad35-f59b31261896" providerId="ADAL" clId="{35087783-BA59-4BF9-AF06-0D08442361EA}" dt="2026-10-22T20:56:17.708" v="25" actId="14100"/>
-          <ac:spMkLst>
-            <pc:docMk/>
-            <pc:sldMk cId="0" sldId="2147479596"/>
-            <ac:spMk id="5" creationId="{00000000-0000-0000-0000-000000000000}"/>
-          </ac:spMkLst>
-        </pc:spChg>
-      </pc:sldChg>
-      <pc:sldChg chg="addSp delSp modSp del mod">
-        <pc:chgData name="Jenkins NS" userId="8bdba4d2-1367-40cf-ad35-f59b31261896" providerId="ADAL" clId="{35087783-BA59-4BF9-AF06-0D08442361EA}" dt="2026-10-22T20:56:24.818" v="35" actId="47"/>
-        <pc:sldMkLst>
-          <pc:docMk/>
-          <pc:sldMk cId="0" sldId="2147479597"/>
-        </pc:sldMkLst>
-        <pc:spChg chg="add del mod">
-          <ac:chgData name="Jenkins NS" userId="8bdba4d2-1367-40cf-ad35-f59b31261896" providerId="ADAL" clId="{35087783-BA59-4BF9-AF06-0D08442361EA}" dt="2026-10-22T20:56:17.029" v="22" actId="6549"/>
-          <ac:spMkLst>
-            <pc:docMk/>
-            <pc:sldMk cId="0" sldId="2147479597"/>
-            <ac:spMk id="2" creationId="{00000000-0000-0000-0000-000000000000}"/>
-          </ac:spMkLst>
-        </pc:spChg>
-        <pc:spChg chg="add del">
-          <ac:chgData name="Jenkins NS" userId="8bdba4d2-1367-40cf-ad35-f59b31261896" providerId="ADAL" clId="{35087783-BA59-4BF9-AF06-0D08442361EA}" dt="2026-10-22T20:56:17.262" v="23" actId="478"/>
-          <ac:spMkLst>
-            <pc:docMk/>
-            <pc:sldMk cId="0" sldId="2147479597"/>
-            <ac:spMk id="3" creationId="{00000000-0000-0000-0000-000000000000}"/>
-          </ac:spMkLst>
-        </pc:spChg>
-        <pc:spChg chg="add del">
-          <ac:chgData name="Jenkins NS" userId="8bdba4d2-1367-40cf-ad35-f59b31261896" providerId="ADAL" clId="{35087783-BA59-4BF9-AF06-0D08442361EA}" dt="2026-10-22T20:56:17.481" v="24" actId="478"/>
-          <ac:spMkLst>
-            <pc:docMk/>
-            <pc:sldMk cId="0" sldId="2147479597"/>
-            <ac:spMk id="4" creationId="{00000000-0000-0000-0000-000000000000}"/>
-          </ac:spMkLst>
-        </pc:spChg>
-        <pc:spChg chg="mod">
-          <ac:chgData name="Jenkins NS" userId="8bdba4d2-1367-40cf-ad35-f59b31261896" providerId="ADAL" clId="{35087783-BA59-4BF9-AF06-0D08442361EA}" dt="2026-10-22T20:56:16.621" v="20" actId="14100"/>
-          <ac:spMkLst>
-            <pc:docMk/>
-            <pc:sldMk cId="0" sldId="2147479597"/>
-            <ac:spMk id="5" creationId="{00000000-0000-0000-0000-000000000000}"/>
-          </ac:spMkLst>
-        </pc:spChg>
-      </pc:sldChg>
-      <pc:sldChg chg="del">
-        <pc:chgData name="Jenkins NS" userId="8bdba4d2-1367-40cf-ad35-f59b31261896" providerId="ADAL" clId="{35087783-BA59-4BF9-AF06-0D08442361EA}" dt="2026-10-22T20:54:52.392" v="0" actId="47"/>
-        <pc:sldMkLst>
-          <pc:docMk/>
-          <pc:sldMk cId="2017300280" sldId="2147479599"/>
-        </pc:sldMkLst>
-      </pc:sldChg>
-      <pc:sldChg chg="add del">
-        <pc:chgData name="Jenkins NS" userId="8bdba4d2-1367-40cf-ad35-f59b31261896" providerId="ADAL" clId="{35087783-BA59-4BF9-AF06-0D08442361EA}" dt="2026-10-23T05:35:15.489" v="39" actId="47"/>
-        <pc:sldMkLst>
-          <pc:docMk/>
-          <pc:sldMk cId="3382622447" sldId="2147479600"/>
-        </pc:sldMkLst>
-      </pc:sldChg>
-      <pc:sldChg chg="add del">
-        <pc:chgData name="Jenkins NS" userId="8bdba4d2-1367-40cf-ad35-f59b31261896" providerId="ADAL" clId="{35087783-BA59-4BF9-AF06-0D08442361EA}" dt="2026-10-22T20:56:20.943" v="34" actId="47"/>
-        <pc:sldMkLst>
-          <pc:docMk/>
-          <pc:sldMk cId="703889543" sldId="2147479601"/>
-        </pc:sldMkLst>
+            <pc:sldMk cId="1180975732" sldId="2147479602"/>
+            <ac:picMk id="5" creationId="{0C8C7931-518A-C091-DED7-851DF9ED915B}"/>
+          </ac:picMkLst>
+        </pc:picChg>
       </pc:sldChg>
       <pc:sldChg chg="del">
         <pc:chgData name="Jenkins NS" userId="8bdba4d2-1367-40cf-ad35-f59b31261896" providerId="ADAL" clId="{35087783-BA59-4BF9-AF06-0D08442361EA}" dt="2026-10-22T20:56:24.818" v="35" actId="47"/>
@@ -2479,7 +2373,7 @@
           <a:p>
             <a:fld id="{9A68FD0E-F9ED-4497-A478-7758BBAF08B6}" type="datetimeFigureOut">
               <a:rPr lang="en-IN" smtClean="0"/>
-              <a:t>23-10-2026</a:t>
+              <a:t>29-10-2026</a:t>
             </a:fld>
             <a:endParaRPr lang="en-IN"/>
           </a:p>
@@ -2949,7 +2843,7 @@
                 <a:tabLst/>
                 <a:defRPr/>
               </a:pPr>
-              <a:t>11</a:t>
+              <a:t>12</a:t>
             </a:fld>
             <a:endParaRPr kumimoji="0" lang="en-US" sz="1800" b="0" i="0" u="none" strike="noStrike" kern="1200" cap="none" spc="0" normalizeH="0" baseline="0" noProof="0">
               <a:ln>
@@ -3028,153 +2922,6 @@
             <a:r>
               <a:rPr lang="en-US" dirty="0"/>
               <a:t>Makers remain responsible for making sure their prompts and models follow responsible AI practices and internal governance standards. If a model generates content that is not relevant to the use case, adjust the prompt. Check the current list of available regions on Microsoft Learn.</a:t>
-            </a:r>
-          </a:p>
-        </p:txBody>
-      </p:sp>
-      <p:sp>
-        <p:nvSpPr>
-          <p:cNvPr id="4" name="Slide Number Placeholder 3"/>
-          <p:cNvSpPr>
-            <a:spLocks noGrp="1"/>
-          </p:cNvSpPr>
-          <p:nvPr>
-            <p:ph type="sldNum" sz="quarter" idx="10"/>
-          </p:nvPr>
-        </p:nvSpPr>
-        <p:spPr/>
-        <p:txBody>
-          <a:bodyPr/>
-          <a:lstStyle/>
-          <a:p>
-            <a:pPr marL="0" marR="0" lvl="0" indent="0" algn="l" defTabSz="914400" rtl="0" eaLnBrk="1" fontAlgn="auto" latinLnBrk="0" hangingPunct="1">
-              <a:lnSpc>
-                <a:spcPct val="100000"/>
-              </a:lnSpc>
-              <a:spcBef>
-                <a:spcPts val="0"/>
-              </a:spcBef>
-              <a:spcAft>
-                <a:spcPts val="0"/>
-              </a:spcAft>
-              <a:buClrTx/>
-              <a:buSzTx/>
-              <a:buFontTx/>
-              <a:buNone/>
-              <a:tabLst/>
-              <a:defRPr/>
-            </a:pPr>
-            <a:fld id="{F7021451-1387-4CA6-816F-3879F97B5CBC}" type="slidenum">
-              <a:rPr kumimoji="0" lang="en-US" sz="1800" b="0" i="0" u="none" strike="noStrike" kern="1200" cap="none" spc="0" normalizeH="0" baseline="0" noProof="0">
-                <a:ln>
-                  <a:noFill/>
-                </a:ln>
-                <a:solidFill>
-                  <a:prstClr val="black"/>
-                </a:solidFill>
-                <a:effectLst/>
-                <a:uLnTx/>
-                <a:uFillTx/>
-                <a:latin typeface="Aptos" panose="02110004020202020204"/>
-                <a:ea typeface="+mn-ea"/>
-                <a:cs typeface="+mn-cs"/>
-              </a:rPr>
-              <a:pPr marL="0" marR="0" lvl="0" indent="0" algn="l" defTabSz="914400" rtl="0" eaLnBrk="1" fontAlgn="auto" latinLnBrk="0" hangingPunct="1">
-                <a:lnSpc>
-                  <a:spcPct val="100000"/>
-                </a:lnSpc>
-                <a:spcBef>
-                  <a:spcPts val="0"/>
-                </a:spcBef>
-                <a:spcAft>
-                  <a:spcPts val="0"/>
-                </a:spcAft>
-                <a:buClrTx/>
-                <a:buSzTx/>
-                <a:buFontTx/>
-                <a:buNone/>
-                <a:tabLst/>
-                <a:defRPr/>
-              </a:pPr>
-              <a:t>12</a:t>
-            </a:fld>
-            <a:endParaRPr kumimoji="0" lang="en-US" sz="1800" b="0" i="0" u="none" strike="noStrike" kern="1200" cap="none" spc="0" normalizeH="0" baseline="0" noProof="0">
-              <a:ln>
-                <a:noFill/>
-              </a:ln>
-              <a:solidFill>
-                <a:prstClr val="black"/>
-              </a:solidFill>
-              <a:effectLst/>
-              <a:uLnTx/>
-              <a:uFillTx/>
-              <a:latin typeface="Aptos" panose="02110004020202020204"/>
-              <a:ea typeface="+mn-ea"/>
-              <a:cs typeface="+mn-cs"/>
-            </a:endParaRPr>
-          </a:p>
-        </p:txBody>
-      </p:sp>
-    </p:spTree>
-    <p:extLst>
-      <p:ext uri="{BB962C8B-B14F-4D97-AF65-F5344CB8AC3E}">
-        <p14:creationId xmlns:p14="http://schemas.microsoft.com/office/powerpoint/2010/main" val="1024086991"/>
-      </p:ext>
-    </p:extLst>
-  </p:cSld>
-  <p:clrMapOvr>
-    <a:masterClrMapping/>
-  </p:clrMapOvr>
-</p:notes>
-</file>
-
-<file path=ppt/notesSlides/notesSlide12.xml><?xml version="1.0" encoding="utf-8"?>
-<p:notes xmlns:a="http://schemas.openxmlformats.org/drawingml/2006/main" xmlns:r="http://schemas.openxmlformats.org/officeDocument/2006/relationships" xmlns:p="http://schemas.openxmlformats.org/presentationml/2006/main">
-  <p:cSld>
-    <p:spTree>
-      <p:nvGrpSpPr>
-        <p:cNvPr id="1" name=""/>
-        <p:cNvGrpSpPr/>
-        <p:nvPr/>
-      </p:nvGrpSpPr>
-      <p:grpSpPr>
-        <a:xfrm>
-          <a:off x="0" y="0"/>
-          <a:ext cx="0" cy="0"/>
-          <a:chOff x="0" y="0"/>
-          <a:chExt cx="0" cy="0"/>
-        </a:xfrm>
-      </p:grpSpPr>
-      <p:sp>
-        <p:nvSpPr>
-          <p:cNvPr id="2" name="Slide Image Placeholder 1"/>
-          <p:cNvSpPr>
-            <a:spLocks noGrp="1" noRot="1" noChangeAspect="1"/>
-          </p:cNvSpPr>
-          <p:nvPr>
-            <p:ph type="sldImg"/>
-          </p:nvPr>
-        </p:nvSpPr>
-        <p:spPr/>
-      </p:sp>
-      <p:sp>
-        <p:nvSpPr>
-          <p:cNvPr id="3" name="Notes Placeholder 2"/>
-          <p:cNvSpPr>
-            <a:spLocks noGrp="1"/>
-          </p:cNvSpPr>
-          <p:nvPr>
-            <p:ph type="body" idx="1"/>
-          </p:nvPr>
-        </p:nvSpPr>
-        <p:spPr/>
-        <p:txBody>
-          <a:bodyPr/>
-          <a:lstStyle/>
-          <a:p>
-            <a:r>
-              <a:rPr lang="en-US" dirty="0"/>
-              <a:t>Give participants three sample emails of different lengths, one of them with no action items, so they see how the prompt behaves on edge cases. Encourage them to add an example of the desired output format to the prompt and compare results. Time estimate is a suggestion; adjust it for your group.</a:t>
             </a:r>
           </a:p>
         </p:txBody>
@@ -3275,18 +3022,12 @@
 </p:notes>
 </file>
 
-<file path=ppt/notesSlides/notesSlide13.xml><?xml version="1.0" encoding="utf-8"?>
+<file path=ppt/notesSlides/notesSlide12.xml><?xml version="1.0" encoding="utf-8"?>
 <p:notes xmlns:a="http://schemas.openxmlformats.org/drawingml/2006/main" xmlns:r="http://schemas.openxmlformats.org/officeDocument/2006/relationships" xmlns:p="http://schemas.openxmlformats.org/presentationml/2006/main">
   <p:cSld>
     <p:spTree>
       <p:nvGrpSpPr>
-        <p:cNvPr id="1" name="">
-          <a:extLst>
-            <a:ext uri="{FF2B5EF4-FFF2-40B4-BE49-F238E27FC236}">
-              <a16:creationId xmlns:a16="http://schemas.microsoft.com/office/drawing/2014/main" id="{A6C63D4D-0C09-B9BB-B665-5571CCBDDDDD}"/>
-            </a:ext>
-          </a:extLst>
-        </p:cNvPr>
+        <p:cNvPr id="1" name=""/>
         <p:cNvGrpSpPr/>
         <p:nvPr/>
       </p:nvGrpSpPr>
@@ -3300,13 +3041,7 @@
       </p:grpSpPr>
       <p:sp>
         <p:nvSpPr>
-          <p:cNvPr id="2" name="Slide Image Placeholder 1">
-            <a:extLst>
-              <a:ext uri="{FF2B5EF4-FFF2-40B4-BE49-F238E27FC236}">
-                <a16:creationId xmlns:a16="http://schemas.microsoft.com/office/drawing/2014/main" id="{02D1B8E3-5C5D-3E3B-25DE-8D2BA75558CE}"/>
-              </a:ext>
-            </a:extLst>
-          </p:cNvPr>
+          <p:cNvPr id="2" name="Slide Image Placeholder 1"/>
           <p:cNvSpPr>
             <a:spLocks noGrp="1" noRot="1" noChangeAspect="1"/>
           </p:cNvSpPr>
@@ -3318,13 +3053,7 @@
       </p:sp>
       <p:sp>
         <p:nvSpPr>
-          <p:cNvPr id="3" name="Notes Placeholder 2">
-            <a:extLst>
-              <a:ext uri="{FF2B5EF4-FFF2-40B4-BE49-F238E27FC236}">
-                <a16:creationId xmlns:a16="http://schemas.microsoft.com/office/drawing/2014/main" id="{4AF1E734-85B5-9E5E-62F7-279B6E19A8AC}"/>
-              </a:ext>
-            </a:extLst>
-          </p:cNvPr>
+          <p:cNvPr id="3" name="Notes Placeholder 2"/>
           <p:cNvSpPr>
             <a:spLocks noGrp="1"/>
           </p:cNvSpPr>
@@ -3339,20 +3068,14 @@
           <a:p>
             <a:r>
               <a:rPr lang="en-US" dirty="0"/>
-              <a:t>Welcome. This deck walks through what you need before building your first Power Apps Code App, then the six commands that take you from a starter template to a deployed app.</a:t>
+              <a:t>Give participants three sample emails of different lengths, one of them with no action items, so they see how the prompt behaves on edge cases. Encourage them to add an example of the desired output format to the prompt and compare results. Time estimate is a suggestion; adjust it for your group.</a:t>
             </a:r>
           </a:p>
         </p:txBody>
       </p:sp>
       <p:sp>
         <p:nvSpPr>
-          <p:cNvPr id="4" name="Slide Number Placeholder 3">
-            <a:extLst>
-              <a:ext uri="{FF2B5EF4-FFF2-40B4-BE49-F238E27FC236}">
-                <a16:creationId xmlns:a16="http://schemas.microsoft.com/office/drawing/2014/main" id="{ACD8DBEC-D460-2BF6-0702-DACF0D60DBE3}"/>
-              </a:ext>
-            </a:extLst>
-          </p:cNvPr>
+          <p:cNvPr id="4" name="Slide Number Placeholder 3"/>
           <p:cNvSpPr>
             <a:spLocks noGrp="1"/>
           </p:cNvSpPr>
@@ -3436,6 +3159,177 @@
     </p:spTree>
     <p:extLst>
       <p:ext uri="{BB962C8B-B14F-4D97-AF65-F5344CB8AC3E}">
+        <p14:creationId xmlns:p14="http://schemas.microsoft.com/office/powerpoint/2010/main" val="1024086991"/>
+      </p:ext>
+    </p:extLst>
+  </p:cSld>
+  <p:clrMapOvr>
+    <a:masterClrMapping/>
+  </p:clrMapOvr>
+</p:notes>
+</file>
+
+<file path=ppt/notesSlides/notesSlide13.xml><?xml version="1.0" encoding="utf-8"?>
+<p:notes xmlns:a="http://schemas.openxmlformats.org/drawingml/2006/main" xmlns:r="http://schemas.openxmlformats.org/officeDocument/2006/relationships" xmlns:p="http://schemas.openxmlformats.org/presentationml/2006/main">
+  <p:cSld>
+    <p:spTree>
+      <p:nvGrpSpPr>
+        <p:cNvPr id="1" name="">
+          <a:extLst>
+            <a:ext uri="{FF2B5EF4-FFF2-40B4-BE49-F238E27FC236}">
+              <a16:creationId xmlns:a16="http://schemas.microsoft.com/office/drawing/2014/main" id="{A6C63D4D-0C09-B9BB-B665-5571CCBDDDDD}"/>
+            </a:ext>
+          </a:extLst>
+        </p:cNvPr>
+        <p:cNvGrpSpPr/>
+        <p:nvPr/>
+      </p:nvGrpSpPr>
+      <p:grpSpPr>
+        <a:xfrm>
+          <a:off x="0" y="0"/>
+          <a:ext cx="0" cy="0"/>
+          <a:chOff x="0" y="0"/>
+          <a:chExt cx="0" cy="0"/>
+        </a:xfrm>
+      </p:grpSpPr>
+      <p:sp>
+        <p:nvSpPr>
+          <p:cNvPr id="2" name="Slide Image Placeholder 1">
+            <a:extLst>
+              <a:ext uri="{FF2B5EF4-FFF2-40B4-BE49-F238E27FC236}">
+                <a16:creationId xmlns:a16="http://schemas.microsoft.com/office/drawing/2014/main" id="{02D1B8E3-5C5D-3E3B-25DE-8D2BA75558CE}"/>
+              </a:ext>
+            </a:extLst>
+          </p:cNvPr>
+          <p:cNvSpPr>
+            <a:spLocks noGrp="1" noRot="1" noChangeAspect="1"/>
+          </p:cNvSpPr>
+          <p:nvPr>
+            <p:ph type="sldImg"/>
+          </p:nvPr>
+        </p:nvSpPr>
+        <p:spPr/>
+      </p:sp>
+      <p:sp>
+        <p:nvSpPr>
+          <p:cNvPr id="3" name="Notes Placeholder 2">
+            <a:extLst>
+              <a:ext uri="{FF2B5EF4-FFF2-40B4-BE49-F238E27FC236}">
+                <a16:creationId xmlns:a16="http://schemas.microsoft.com/office/drawing/2014/main" id="{4AF1E734-85B5-9E5E-62F7-279B6E19A8AC}"/>
+              </a:ext>
+            </a:extLst>
+          </p:cNvPr>
+          <p:cNvSpPr>
+            <a:spLocks noGrp="1"/>
+          </p:cNvSpPr>
+          <p:nvPr>
+            <p:ph type="body" idx="1"/>
+          </p:nvPr>
+        </p:nvSpPr>
+        <p:spPr/>
+        <p:txBody>
+          <a:bodyPr/>
+          <a:lstStyle/>
+          <a:p>
+            <a:r>
+              <a:rPr lang="en-US" dirty="0"/>
+              <a:t>Welcome. This deck walks through what you need before building your first Power Apps Code App, then the six commands that take you from a starter template to a deployed app.</a:t>
+            </a:r>
+          </a:p>
+        </p:txBody>
+      </p:sp>
+      <p:sp>
+        <p:nvSpPr>
+          <p:cNvPr id="4" name="Slide Number Placeholder 3">
+            <a:extLst>
+              <a:ext uri="{FF2B5EF4-FFF2-40B4-BE49-F238E27FC236}">
+                <a16:creationId xmlns:a16="http://schemas.microsoft.com/office/drawing/2014/main" id="{ACD8DBEC-D460-2BF6-0702-DACF0D60DBE3}"/>
+              </a:ext>
+            </a:extLst>
+          </p:cNvPr>
+          <p:cNvSpPr>
+            <a:spLocks noGrp="1"/>
+          </p:cNvSpPr>
+          <p:nvPr>
+            <p:ph type="sldNum" sz="quarter" idx="10"/>
+          </p:nvPr>
+        </p:nvSpPr>
+        <p:spPr/>
+        <p:txBody>
+          <a:bodyPr/>
+          <a:lstStyle/>
+          <a:p>
+            <a:pPr marL="0" marR="0" lvl="0" indent="0" algn="l" defTabSz="914400" rtl="0" eaLnBrk="1" fontAlgn="auto" latinLnBrk="0" hangingPunct="1">
+              <a:lnSpc>
+                <a:spcPct val="100000"/>
+              </a:lnSpc>
+              <a:spcBef>
+                <a:spcPts val="0"/>
+              </a:spcBef>
+              <a:spcAft>
+                <a:spcPts val="0"/>
+              </a:spcAft>
+              <a:buClrTx/>
+              <a:buSzTx/>
+              <a:buFontTx/>
+              <a:buNone/>
+              <a:tabLst/>
+              <a:defRPr/>
+            </a:pPr>
+            <a:fld id="{F7021451-1387-4CA6-816F-3879F97B5CBC}" type="slidenum">
+              <a:rPr kumimoji="0" lang="en-US" sz="1800" b="0" i="0" u="none" strike="noStrike" kern="1200" cap="none" spc="0" normalizeH="0" baseline="0" noProof="0">
+                <a:ln>
+                  <a:noFill/>
+                </a:ln>
+                <a:solidFill>
+                  <a:prstClr val="black"/>
+                </a:solidFill>
+                <a:effectLst/>
+                <a:uLnTx/>
+                <a:uFillTx/>
+                <a:latin typeface="Aptos" panose="02110004020202020204"/>
+                <a:ea typeface="+mn-ea"/>
+                <a:cs typeface="+mn-cs"/>
+              </a:rPr>
+              <a:pPr marL="0" marR="0" lvl="0" indent="0" algn="l" defTabSz="914400" rtl="0" eaLnBrk="1" fontAlgn="auto" latinLnBrk="0" hangingPunct="1">
+                <a:lnSpc>
+                  <a:spcPct val="100000"/>
+                </a:lnSpc>
+                <a:spcBef>
+                  <a:spcPts val="0"/>
+                </a:spcBef>
+                <a:spcAft>
+                  <a:spcPts val="0"/>
+                </a:spcAft>
+                <a:buClrTx/>
+                <a:buSzTx/>
+                <a:buFontTx/>
+                <a:buNone/>
+                <a:tabLst/>
+                <a:defRPr/>
+              </a:pPr>
+              <a:t>15</a:t>
+            </a:fld>
+            <a:endParaRPr kumimoji="0" lang="en-US" sz="1800" b="0" i="0" u="none" strike="noStrike" kern="1200" cap="none" spc="0" normalizeH="0" baseline="0" noProof="0">
+              <a:ln>
+                <a:noFill/>
+              </a:ln>
+              <a:solidFill>
+                <a:prstClr val="black"/>
+              </a:solidFill>
+              <a:effectLst/>
+              <a:uLnTx/>
+              <a:uFillTx/>
+              <a:latin typeface="Aptos" panose="02110004020202020204"/>
+              <a:ea typeface="+mn-ea"/>
+              <a:cs typeface="+mn-cs"/>
+            </a:endParaRPr>
+          </a:p>
+        </p:txBody>
+      </p:sp>
+    </p:spTree>
+    <p:extLst>
+      <p:ext uri="{BB962C8B-B14F-4D97-AF65-F5344CB8AC3E}">
         <p14:creationId xmlns:p14="http://schemas.microsoft.com/office/powerpoint/2010/main" val="3490934983"/>
       </p:ext>
     </p:extLst>
@@ -3855,7 +3749,7 @@
                 <a:tabLst/>
                 <a:defRPr/>
               </a:pPr>
-              <a:t>5</a:t>
+              <a:t>6</a:t>
             </a:fld>
             <a:endParaRPr kumimoji="0" lang="en-US" sz="1800" b="0" i="0" u="none" strike="noStrike" kern="1200" cap="none" spc="0" normalizeH="0" baseline="0" noProof="0">
               <a:ln>
@@ -3934,153 +3828,6 @@
             <a:r>
               <a:rPr lang="en-US" dirty="0"/>
               <a:t>Custom models need labelled training data and time to train and test, so they cost more effort. Testing prebuilt or custom models in the maker portals does not consume credits.</a:t>
-            </a:r>
-          </a:p>
-        </p:txBody>
-      </p:sp>
-      <p:sp>
-        <p:nvSpPr>
-          <p:cNvPr id="4" name="Slide Number Placeholder 3"/>
-          <p:cNvSpPr>
-            <a:spLocks noGrp="1"/>
-          </p:cNvSpPr>
-          <p:nvPr>
-            <p:ph type="sldNum" sz="quarter" idx="10"/>
-          </p:nvPr>
-        </p:nvSpPr>
-        <p:spPr/>
-        <p:txBody>
-          <a:bodyPr/>
-          <a:lstStyle/>
-          <a:p>
-            <a:pPr marL="0" marR="0" lvl="0" indent="0" algn="l" defTabSz="914400" rtl="0" eaLnBrk="1" fontAlgn="auto" latinLnBrk="0" hangingPunct="1">
-              <a:lnSpc>
-                <a:spcPct val="100000"/>
-              </a:lnSpc>
-              <a:spcBef>
-                <a:spcPts val="0"/>
-              </a:spcBef>
-              <a:spcAft>
-                <a:spcPts val="0"/>
-              </a:spcAft>
-              <a:buClrTx/>
-              <a:buSzTx/>
-              <a:buFontTx/>
-              <a:buNone/>
-              <a:tabLst/>
-              <a:defRPr/>
-            </a:pPr>
-            <a:fld id="{F7021451-1387-4CA6-816F-3879F97B5CBC}" type="slidenum">
-              <a:rPr kumimoji="0" lang="en-US" sz="1800" b="0" i="0" u="none" strike="noStrike" kern="1200" cap="none" spc="0" normalizeH="0" baseline="0" noProof="0">
-                <a:ln>
-                  <a:noFill/>
-                </a:ln>
-                <a:solidFill>
-                  <a:prstClr val="black"/>
-                </a:solidFill>
-                <a:effectLst/>
-                <a:uLnTx/>
-                <a:uFillTx/>
-                <a:latin typeface="Aptos" panose="02110004020202020204"/>
-                <a:ea typeface="+mn-ea"/>
-                <a:cs typeface="+mn-cs"/>
-              </a:rPr>
-              <a:pPr marL="0" marR="0" lvl="0" indent="0" algn="l" defTabSz="914400" rtl="0" eaLnBrk="1" fontAlgn="auto" latinLnBrk="0" hangingPunct="1">
-                <a:lnSpc>
-                  <a:spcPct val="100000"/>
-                </a:lnSpc>
-                <a:spcBef>
-                  <a:spcPts val="0"/>
-                </a:spcBef>
-                <a:spcAft>
-                  <a:spcPts val="0"/>
-                </a:spcAft>
-                <a:buClrTx/>
-                <a:buSzTx/>
-                <a:buFontTx/>
-                <a:buNone/>
-                <a:tabLst/>
-                <a:defRPr/>
-              </a:pPr>
-              <a:t>6</a:t>
-            </a:fld>
-            <a:endParaRPr kumimoji="0" lang="en-US" sz="1800" b="0" i="0" u="none" strike="noStrike" kern="1200" cap="none" spc="0" normalizeH="0" baseline="0" noProof="0">
-              <a:ln>
-                <a:noFill/>
-              </a:ln>
-              <a:solidFill>
-                <a:prstClr val="black"/>
-              </a:solidFill>
-              <a:effectLst/>
-              <a:uLnTx/>
-              <a:uFillTx/>
-              <a:latin typeface="Aptos" panose="02110004020202020204"/>
-              <a:ea typeface="+mn-ea"/>
-              <a:cs typeface="+mn-cs"/>
-            </a:endParaRPr>
-          </a:p>
-        </p:txBody>
-      </p:sp>
-    </p:spTree>
-    <p:extLst>
-      <p:ext uri="{BB962C8B-B14F-4D97-AF65-F5344CB8AC3E}">
-        <p14:creationId xmlns:p14="http://schemas.microsoft.com/office/powerpoint/2010/main" val="1024086991"/>
-      </p:ext>
-    </p:extLst>
-  </p:cSld>
-  <p:clrMapOvr>
-    <a:masterClrMapping/>
-  </p:clrMapOvr>
-</p:notes>
-</file>
-
-<file path=ppt/notesSlides/notesSlide6.xml><?xml version="1.0" encoding="utf-8"?>
-<p:notes xmlns:a="http://schemas.openxmlformats.org/drawingml/2006/main" xmlns:r="http://schemas.openxmlformats.org/officeDocument/2006/relationships" xmlns:p="http://schemas.openxmlformats.org/presentationml/2006/main">
-  <p:cSld>
-    <p:spTree>
-      <p:nvGrpSpPr>
-        <p:cNvPr id="1" name=""/>
-        <p:cNvGrpSpPr/>
-        <p:nvPr/>
-      </p:nvGrpSpPr>
-      <p:grpSpPr>
-        <a:xfrm>
-          <a:off x="0" y="0"/>
-          <a:ext cx="0" cy="0"/>
-          <a:chOff x="0" y="0"/>
-          <a:chExt cx="0" cy="0"/>
-        </a:xfrm>
-      </p:grpSpPr>
-      <p:sp>
-        <p:nvSpPr>
-          <p:cNvPr id="2" name="Slide Image Placeholder 1"/>
-          <p:cNvSpPr>
-            <a:spLocks noGrp="1" noRot="1" noChangeAspect="1"/>
-          </p:cNvSpPr>
-          <p:nvPr>
-            <p:ph type="sldImg"/>
-          </p:nvPr>
-        </p:nvSpPr>
-        <p:spPr/>
-      </p:sp>
-      <p:sp>
-        <p:nvSpPr>
-          <p:cNvPr id="3" name="Notes Placeholder 2"/>
-          <p:cNvSpPr>
-            <a:spLocks noGrp="1"/>
-          </p:cNvSpPr>
-          <p:nvPr>
-            <p:ph type="body" idx="1"/>
-          </p:nvPr>
-        </p:nvSpPr>
-        <p:spPr/>
-        <p:txBody>
-          <a:bodyPr/>
-          <a:lstStyle/>
-          <a:p>
-            <a:r>
-              <a:rPr lang="en-US" dirty="0"/>
-              <a:t>Documents can be structured, like invoices, or unstructured, like resumes. Automating extraction speeds up tedious manual work and reduces errors. Demo idea: drop a sample invoice into a SharePoint library and show the extracted fields in the flow run history.</a:t>
             </a:r>
           </a:p>
         </p:txBody>
@@ -4181,7 +3928,7 @@
 </p:notes>
 </file>
 
-<file path=ppt/notesSlides/notesSlide7.xml><?xml version="1.0" encoding="utf-8"?>
+<file path=ppt/notesSlides/notesSlide6.xml><?xml version="1.0" encoding="utf-8"?>
 <p:notes xmlns:a="http://schemas.openxmlformats.org/drawingml/2006/main" xmlns:r="http://schemas.openxmlformats.org/officeDocument/2006/relationships" xmlns:p="http://schemas.openxmlformats.org/presentationml/2006/main">
   <p:cSld>
     <p:spTree>
@@ -4227,7 +3974,7 @@
           <a:p>
             <a:r>
               <a:rPr lang="en-US" dirty="0"/>
-              <a:t>A prompt is a natural-language instruction that tells a large language model what to do. Prompts are solution-aware, so they can be moved between environments with your other components. In Copilot Studio you can also add a prompt as a tool inside an agent. Menu names may shift slightly between releases.</a:t>
+              <a:t>Documents can be structured, like invoices, or unstructured, like resumes. Automating extraction speeds up tedious manual work and reduces errors. Demo idea: drop a sample invoice into a SharePoint library and show the extracted fields in the flow run history.</a:t>
             </a:r>
           </a:p>
         </p:txBody>
@@ -4328,7 +4075,7 @@
 </p:notes>
 </file>
 
-<file path=ppt/notesSlides/notesSlide8.xml><?xml version="1.0" encoding="utf-8"?>
+<file path=ppt/notesSlides/notesSlide7.xml><?xml version="1.0" encoding="utf-8"?>
 <p:notes xmlns:a="http://schemas.openxmlformats.org/drawingml/2006/main" xmlns:r="http://schemas.openxmlformats.org/officeDocument/2006/relationships" xmlns:p="http://schemas.openxmlformats.org/presentationml/2006/main">
   <p:cSld>
     <p:spTree>
@@ -4374,7 +4121,7 @@
           <a:p>
             <a:r>
               <a:rPr lang="en-US" dirty="0"/>
-              <a:t>Prompts are cheaper and faster to start with, but output can vary and may need validation or post-processing. Models are the safer choice for repeatable, accuracy-critical production scenarios. The platform is shifting toward prompts, and prebuilt document models are also available as editable prompt templates.</a:t>
+              <a:t>A prompt is a natural-language instruction that tells a large language model what to do. Prompts are solution-aware, so they can be moved between environments with your other components. In Copilot Studio you can also add a prompt as a tool inside an agent. Menu names may shift slightly between releases.</a:t>
             </a:r>
           </a:p>
         </p:txBody>
@@ -4475,7 +4222,7 @@
 </p:notes>
 </file>
 
-<file path=ppt/notesSlides/notesSlide9.xml><?xml version="1.0" encoding="utf-8"?>
+<file path=ppt/notesSlides/notesSlide8.xml><?xml version="1.0" encoding="utf-8"?>
 <p:notes xmlns:a="http://schemas.openxmlformats.org/drawingml/2006/main" xmlns:r="http://schemas.openxmlformats.org/officeDocument/2006/relationships" xmlns:p="http://schemas.openxmlformats.org/presentationml/2006/main">
   <p:cSld>
     <p:spTree>
@@ -4521,7 +4268,7 @@
           <a:p>
             <a:r>
               <a:rPr lang="en-US" dirty="0"/>
-              <a:t>This is the pattern most teams start with: trigger, extract, validate, approve, record. Step 3 is optional and shows how models and prompts can be combined. Keep a human at step 4 for anything with financial impact.</a:t>
+              <a:t>Prompts are cheaper and faster to start with, but output can vary and may need validation or post-processing. Models are the safer choice for repeatable, accuracy-critical production scenarios. The platform is shifting toward prompts, and prebuilt document models are also available as editable prompt templates.</a:t>
             </a:r>
           </a:p>
         </p:txBody>
@@ -4622,6 +4369,153 @@
 </p:notes>
 </file>
 
+<file path=ppt/notesSlides/notesSlide9.xml><?xml version="1.0" encoding="utf-8"?>
+<p:notes xmlns:a="http://schemas.openxmlformats.org/drawingml/2006/main" xmlns:r="http://schemas.openxmlformats.org/officeDocument/2006/relationships" xmlns:p="http://schemas.openxmlformats.org/presentationml/2006/main">
+  <p:cSld>
+    <p:spTree>
+      <p:nvGrpSpPr>
+        <p:cNvPr id="1" name=""/>
+        <p:cNvGrpSpPr/>
+        <p:nvPr/>
+      </p:nvGrpSpPr>
+      <p:grpSpPr>
+        <a:xfrm>
+          <a:off x="0" y="0"/>
+          <a:ext cx="0" cy="0"/>
+          <a:chOff x="0" y="0"/>
+          <a:chExt cx="0" cy="0"/>
+        </a:xfrm>
+      </p:grpSpPr>
+      <p:sp>
+        <p:nvSpPr>
+          <p:cNvPr id="2" name="Slide Image Placeholder 1"/>
+          <p:cNvSpPr>
+            <a:spLocks noGrp="1" noRot="1" noChangeAspect="1"/>
+          </p:cNvSpPr>
+          <p:nvPr>
+            <p:ph type="sldImg"/>
+          </p:nvPr>
+        </p:nvSpPr>
+        <p:spPr/>
+      </p:sp>
+      <p:sp>
+        <p:nvSpPr>
+          <p:cNvPr id="3" name="Notes Placeholder 2"/>
+          <p:cNvSpPr>
+            <a:spLocks noGrp="1"/>
+          </p:cNvSpPr>
+          <p:nvPr>
+            <p:ph type="body" idx="1"/>
+          </p:nvPr>
+        </p:nvSpPr>
+        <p:spPr/>
+        <p:txBody>
+          <a:bodyPr/>
+          <a:lstStyle/>
+          <a:p>
+            <a:r>
+              <a:rPr lang="en-US" dirty="0"/>
+              <a:t>This is the pattern most teams start with: trigger, extract, validate, approve, record. Step 3 is optional and shows how models and prompts can be combined. Keep a human at step 4 for anything with financial impact.</a:t>
+            </a:r>
+          </a:p>
+        </p:txBody>
+      </p:sp>
+      <p:sp>
+        <p:nvSpPr>
+          <p:cNvPr id="4" name="Slide Number Placeholder 3"/>
+          <p:cNvSpPr>
+            <a:spLocks noGrp="1"/>
+          </p:cNvSpPr>
+          <p:nvPr>
+            <p:ph type="sldNum" sz="quarter" idx="10"/>
+          </p:nvPr>
+        </p:nvSpPr>
+        <p:spPr/>
+        <p:txBody>
+          <a:bodyPr/>
+          <a:lstStyle/>
+          <a:p>
+            <a:pPr marL="0" marR="0" lvl="0" indent="0" algn="l" defTabSz="914400" rtl="0" eaLnBrk="1" fontAlgn="auto" latinLnBrk="0" hangingPunct="1">
+              <a:lnSpc>
+                <a:spcPct val="100000"/>
+              </a:lnSpc>
+              <a:spcBef>
+                <a:spcPts val="0"/>
+              </a:spcBef>
+              <a:spcAft>
+                <a:spcPts val="0"/>
+              </a:spcAft>
+              <a:buClrTx/>
+              <a:buSzTx/>
+              <a:buFontTx/>
+              <a:buNone/>
+              <a:tabLst/>
+              <a:defRPr/>
+            </a:pPr>
+            <a:fld id="{F7021451-1387-4CA6-816F-3879F97B5CBC}" type="slidenum">
+              <a:rPr kumimoji="0" lang="en-US" sz="1800" b="0" i="0" u="none" strike="noStrike" kern="1200" cap="none" spc="0" normalizeH="0" baseline="0" noProof="0">
+                <a:ln>
+                  <a:noFill/>
+                </a:ln>
+                <a:solidFill>
+                  <a:prstClr val="black"/>
+                </a:solidFill>
+                <a:effectLst/>
+                <a:uLnTx/>
+                <a:uFillTx/>
+                <a:latin typeface="Aptos" panose="02110004020202020204"/>
+                <a:ea typeface="+mn-ea"/>
+                <a:cs typeface="+mn-cs"/>
+              </a:rPr>
+              <a:pPr marL="0" marR="0" lvl="0" indent="0" algn="l" defTabSz="914400" rtl="0" eaLnBrk="1" fontAlgn="auto" latinLnBrk="0" hangingPunct="1">
+                <a:lnSpc>
+                  <a:spcPct val="100000"/>
+                </a:lnSpc>
+                <a:spcBef>
+                  <a:spcPts val="0"/>
+                </a:spcBef>
+                <a:spcAft>
+                  <a:spcPts val="0"/>
+                </a:spcAft>
+                <a:buClrTx/>
+                <a:buSzTx/>
+                <a:buFontTx/>
+                <a:buNone/>
+                <a:tabLst/>
+                <a:defRPr/>
+              </a:pPr>
+              <a:t>11</a:t>
+            </a:fld>
+            <a:endParaRPr kumimoji="0" lang="en-US" sz="1800" b="0" i="0" u="none" strike="noStrike" kern="1200" cap="none" spc="0" normalizeH="0" baseline="0" noProof="0">
+              <a:ln>
+                <a:noFill/>
+              </a:ln>
+              <a:solidFill>
+                <a:prstClr val="black"/>
+              </a:solidFill>
+              <a:effectLst/>
+              <a:uLnTx/>
+              <a:uFillTx/>
+              <a:latin typeface="Aptos" panose="02110004020202020204"/>
+              <a:ea typeface="+mn-ea"/>
+              <a:cs typeface="+mn-cs"/>
+            </a:endParaRPr>
+          </a:p>
+        </p:txBody>
+      </p:sp>
+    </p:spTree>
+    <p:extLst>
+      <p:ext uri="{BB962C8B-B14F-4D97-AF65-F5344CB8AC3E}">
+        <p14:creationId xmlns:p14="http://schemas.microsoft.com/office/powerpoint/2010/main" val="1024086991"/>
+      </p:ext>
+    </p:extLst>
+  </p:cSld>
+  <p:clrMapOvr>
+    <a:masterClrMapping/>
+  </p:clrMapOvr>
+</p:notes>
+</file>
+
 <file path=ppt/slideLayouts/slideLayout1.xml><?xml version="1.0" encoding="utf-8"?>
 <p:sldLayout xmlns:a="http://schemas.openxmlformats.org/drawingml/2006/main" xmlns:r="http://schemas.openxmlformats.org/officeDocument/2006/relationships" xmlns:p="http://schemas.openxmlformats.org/presentationml/2006/main" type="title" preserve="1">
   <p:cSld name="Title Slide">
@@ -4771,7 +4665,7 @@
           <a:p>
             <a:fld id="{A9C7556D-DCD1-4FB9-8695-8902D801681B}" type="datetimeFigureOut">
               <a:rPr lang="en-IN" smtClean="0"/>
-              <a:t>23-10-2026</a:t>
+              <a:t>29-10-2026</a:t>
             </a:fld>
             <a:endParaRPr lang="en-IN"/>
           </a:p>
@@ -4971,7 +4865,7 @@
           <a:p>
             <a:fld id="{A9C7556D-DCD1-4FB9-8695-8902D801681B}" type="datetimeFigureOut">
               <a:rPr lang="en-IN" smtClean="0"/>
-              <a:t>23-10-2026</a:t>
+              <a:t>29-10-2026</a:t>
             </a:fld>
             <a:endParaRPr lang="en-IN"/>
           </a:p>
@@ -5181,7 +5075,7 @@
           <a:p>
             <a:fld id="{A9C7556D-DCD1-4FB9-8695-8902D801681B}" type="datetimeFigureOut">
               <a:rPr lang="en-IN" smtClean="0"/>
-              <a:t>23-10-2026</a:t>
+              <a:t>29-10-2026</a:t>
             </a:fld>
             <a:endParaRPr lang="en-IN"/>
           </a:p>
@@ -6417,7 +6311,7 @@
           <a:p>
             <a:fld id="{A9C7556D-DCD1-4FB9-8695-8902D801681B}" type="datetimeFigureOut">
               <a:rPr lang="en-IN" smtClean="0"/>
-              <a:t>23-10-2026</a:t>
+              <a:t>29-10-2026</a:t>
             </a:fld>
             <a:endParaRPr lang="en-IN"/>
           </a:p>
@@ -6837,7 +6731,7 @@
           <a:p>
             <a:fld id="{A9C7556D-DCD1-4FB9-8695-8902D801681B}" type="datetimeFigureOut">
               <a:rPr lang="en-IN" smtClean="0"/>
-              <a:t>23-10-2026</a:t>
+              <a:t>29-10-2026</a:t>
             </a:fld>
             <a:endParaRPr lang="en-IN"/>
           </a:p>
@@ -7105,7 +6999,7 @@
           <a:p>
             <a:fld id="{A9C7556D-DCD1-4FB9-8695-8902D801681B}" type="datetimeFigureOut">
               <a:rPr lang="en-IN" smtClean="0"/>
-              <a:t>23-10-2026</a:t>
+              <a:t>29-10-2026</a:t>
             </a:fld>
             <a:endParaRPr lang="en-IN"/>
           </a:p>
@@ -7520,7 +7414,7 @@
           <a:p>
             <a:fld id="{A9C7556D-DCD1-4FB9-8695-8902D801681B}" type="datetimeFigureOut">
               <a:rPr lang="en-IN" smtClean="0"/>
-              <a:t>23-10-2026</a:t>
+              <a:t>29-10-2026</a:t>
             </a:fld>
             <a:endParaRPr lang="en-IN"/>
           </a:p>
@@ -7662,7 +7556,7 @@
           <a:p>
             <a:fld id="{A9C7556D-DCD1-4FB9-8695-8902D801681B}" type="datetimeFigureOut">
               <a:rPr lang="en-IN" smtClean="0"/>
-              <a:t>23-10-2026</a:t>
+              <a:t>29-10-2026</a:t>
             </a:fld>
             <a:endParaRPr lang="en-IN"/>
           </a:p>
@@ -7775,7 +7669,7 @@
           <a:p>
             <a:fld id="{A9C7556D-DCD1-4FB9-8695-8902D801681B}" type="datetimeFigureOut">
               <a:rPr lang="en-IN" smtClean="0"/>
-              <a:t>23-10-2026</a:t>
+              <a:t>29-10-2026</a:t>
             </a:fld>
             <a:endParaRPr lang="en-IN"/>
           </a:p>
@@ -8088,7 +7982,7 @@
           <a:p>
             <a:fld id="{A9C7556D-DCD1-4FB9-8695-8902D801681B}" type="datetimeFigureOut">
               <a:rPr lang="en-IN" smtClean="0"/>
-              <a:t>23-10-2026</a:t>
+              <a:t>29-10-2026</a:t>
             </a:fld>
             <a:endParaRPr lang="en-IN"/>
           </a:p>
@@ -8377,7 +8271,7 @@
           <a:p>
             <a:fld id="{A9C7556D-DCD1-4FB9-8695-8902D801681B}" type="datetimeFigureOut">
               <a:rPr lang="en-IN" smtClean="0"/>
-              <a:t>23-10-2026</a:t>
+              <a:t>29-10-2026</a:t>
             </a:fld>
             <a:endParaRPr lang="en-IN"/>
           </a:p>
@@ -8620,7 +8514,7 @@
           <a:p>
             <a:fld id="{A9C7556D-DCD1-4FB9-8695-8902D801681B}" type="datetimeFigureOut">
               <a:rPr lang="en-IN" smtClean="0"/>
-              <a:t>23-10-2026</a:t>
+              <a:t>29-10-2026</a:t>
             </a:fld>
             <a:endParaRPr lang="en-IN"/>
           </a:p>
@@ -10140,6 +10034,1046 @@
                 <a:ea typeface="DM Sans" pitchFamily="34" charset="-122"/>
                 <a:cs typeface="DM Sans" pitchFamily="34" charset="-120"/>
               </a:rPr>
+              <a:t>CHOOSING</a:t>
+            </a:r>
+            <a:endParaRPr kumimoji="0" lang="en-US" sz="1200" b="0" i="0" u="none" strike="noStrike" kern="1200" cap="none" spc="0" normalizeH="0" baseline="0" noProof="0" dirty="0">
+              <a:ln>
+                <a:noFill/>
+              </a:ln>
+              <a:solidFill>
+                <a:srgbClr val="1D1A33"/>
+              </a:solidFill>
+              <a:effectLst/>
+              <a:uLnTx/>
+              <a:uFillTx/>
+              <a:latin typeface="DM Sans"/>
+              <a:ea typeface="+mn-ea"/>
+              <a:cs typeface="+mn-cs"/>
+            </a:endParaRPr>
+          </a:p>
+        </p:txBody>
+      </p:sp>
+      <p:sp>
+        <p:nvSpPr>
+          <p:cNvPr id="3" name="Text 1"/>
+          <p:cNvSpPr>
+            <a:spLocks noGrp="1"/>
+          </p:cNvSpPr>
+          <p:nvPr>
+            <p:ph type="title"/>
+          </p:nvPr>
+        </p:nvSpPr>
+        <p:spPr>
+          <a:xfrm>
+            <a:off x="812800" y="1102320"/>
+            <a:ext cx="10883392" cy="472430"/>
+          </a:xfrm>
+          <a:prstGeom prst="rect">
+            <a:avLst/>
+          </a:prstGeom>
+          <a:noFill/>
+          <a:ln/>
+        </p:spPr>
+        <p:txBody>
+          <a:bodyPr wrap="square" lIns="0" tIns="0" rIns="0" bIns="0" rtlCol="0" anchor="t">
+            <a:normAutofit/>
+          </a:bodyPr>
+          <a:lstStyle/>
+          <a:p>
+            <a:pPr marL="0" indent="0" algn="l">
+              <a:lnSpc>
+                <a:spcPts val="3520"/>
+              </a:lnSpc>
+              <a:buNone/>
+            </a:pPr>
+            <a:r>
+              <a:rPr lang="en-US" sz="3200" b="1" i="0" dirty="0">
+                <a:solidFill>
+                  <a:srgbClr val="1D1A33"/>
+                </a:solidFill>
+                <a:latin typeface="DM Sans" pitchFamily="34" charset="0"/>
+                <a:ea typeface="DM Sans" pitchFamily="34" charset="-122"/>
+                <a:cs typeface="DM Sans" pitchFamily="34" charset="-120"/>
+              </a:rPr>
+              <a:t>Models or prompts?</a:t>
+            </a:r>
+            <a:endParaRPr lang="en-US" sz="3200" dirty="0"/>
+          </a:p>
+        </p:txBody>
+      </p:sp>
+      <p:graphicFrame>
+        <p:nvGraphicFramePr>
+          <p:cNvPr id="4" name="Table 0"/>
+          <p:cNvGraphicFramePr>
+            <a:graphicFrameLocks noGrp="1"/>
+          </p:cNvGraphicFramePr>
+          <p:nvPr/>
+        </p:nvGraphicFramePr>
+        <p:xfrm>
+          <a:off x="825500" y="1866850"/>
+          <a:ext cx="10553700" cy="1792934"/>
+        </p:xfrm>
+        <a:graphic>
+          <a:graphicData uri="http://schemas.openxmlformats.org/drawingml/2006/table">
+            <a:tbl>
+              <a:tblPr/>
+              <a:tblGrid>
+                <a:gridCol w="1899666">
+                  <a:extLst>
+                    <a:ext uri="{9D8B030D-6E8A-4147-A177-3AD203B41FA5}">
+                      <a16:colId xmlns:a16="http://schemas.microsoft.com/office/drawing/2014/main" val="20000"/>
+                    </a:ext>
+                  </a:extLst>
+                </a:gridCol>
+                <a:gridCol w="4327017">
+                  <a:extLst>
+                    <a:ext uri="{9D8B030D-6E8A-4147-A177-3AD203B41FA5}">
+                      <a16:colId xmlns:a16="http://schemas.microsoft.com/office/drawing/2014/main" val="20001"/>
+                    </a:ext>
+                  </a:extLst>
+                </a:gridCol>
+                <a:gridCol w="4327017">
+                  <a:extLst>
+                    <a:ext uri="{9D8B030D-6E8A-4147-A177-3AD203B41FA5}">
+                      <a16:colId xmlns:a16="http://schemas.microsoft.com/office/drawing/2014/main" val="20002"/>
+                    </a:ext>
+                  </a:extLst>
+                </a:gridCol>
+              </a:tblGrid>
+              <a:tr h="386011">
+                <a:tc>
+                  <a:txBody>
+                    <a:bodyPr/>
+                    <a:lstStyle/>
+                    <a:p>
+                      <a:pPr marL="0" indent="0">
+                        <a:lnSpc>
+                          <a:spcPts val="1960"/>
+                        </a:lnSpc>
+                        <a:buNone/>
+                      </a:pPr>
+                      <a:endParaRPr lang="en-US" sz="1400" dirty="0">
+                        <a:latin typeface="DM Sans" charset="0"/>
+                        <a:ea typeface="DM Sans" charset="0"/>
+                        <a:cs typeface="DM Sans" charset="0"/>
+                      </a:endParaRPr>
+                    </a:p>
+                  </a:txBody>
+                  <a:tcPr marL="62230" marR="62230" marT="62230" marB="62230">
+                    <a:lnL w="12700" cap="flat" cmpd="sng" algn="ctr">
+                      <a:solidFill>
+                        <a:srgbClr val="C5C4BF"/>
+                      </a:solidFill>
+                      <a:prstDash val="solid"/>
+                      <a:round/>
+                      <a:headEnd type="none" w="med" len="med"/>
+                      <a:tailEnd type="none" w="med" len="med"/>
+                    </a:lnL>
+                    <a:lnR w="12700" cap="flat" cmpd="sng" algn="ctr">
+                      <a:solidFill>
+                        <a:srgbClr val="B7B5B1"/>
+                      </a:solidFill>
+                      <a:prstDash val="solid"/>
+                      <a:round/>
+                      <a:headEnd type="none" w="med" len="med"/>
+                      <a:tailEnd type="none" w="med" len="med"/>
+                    </a:lnR>
+                    <a:lnT w="12700" cap="flat" cmpd="sng" algn="ctr">
+                      <a:solidFill>
+                        <a:srgbClr val="C5C4BF"/>
+                      </a:solidFill>
+                      <a:prstDash val="solid"/>
+                      <a:round/>
+                      <a:headEnd type="none" w="med" len="med"/>
+                      <a:tailEnd type="none" w="med" len="med"/>
+                    </a:lnT>
+                    <a:lnB w="12700" cap="flat" cmpd="sng" algn="ctr">
+                      <a:solidFill>
+                        <a:srgbClr val="B7B5B1"/>
+                      </a:solidFill>
+                      <a:prstDash val="solid"/>
+                      <a:round/>
+                      <a:headEnd type="none" w="med" len="med"/>
+                      <a:tailEnd type="none" w="med" len="med"/>
+                    </a:lnB>
+                    <a:solidFill>
+                      <a:srgbClr val="E5E3DD"/>
+                    </a:solidFill>
+                  </a:tcPr>
+                </a:tc>
+                <a:tc>
+                  <a:txBody>
+                    <a:bodyPr/>
+                    <a:lstStyle/>
+                    <a:p>
+                      <a:pPr marL="0" indent="0">
+                        <a:lnSpc>
+                          <a:spcPts val="1960"/>
+                        </a:lnSpc>
+                        <a:buNone/>
+                      </a:pPr>
+                      <a:r>
+                        <a:rPr lang="en-US" sz="1400" b="1" dirty="0">
+                          <a:solidFill>
+                            <a:srgbClr val="1D1A33"/>
+                          </a:solidFill>
+                          <a:latin typeface="DM Sans" pitchFamily="34" charset="0"/>
+                          <a:ea typeface="DM Sans" pitchFamily="34" charset="-122"/>
+                          <a:cs typeface="DM Sans" pitchFamily="34" charset="-120"/>
+                        </a:rPr>
+                        <a:t>Prebuilt and custom models</a:t>
+                      </a:r>
+                      <a:endParaRPr lang="en-US" sz="1400" dirty="0">
+                        <a:latin typeface="DM Sans" charset="0"/>
+                        <a:ea typeface="DM Sans" charset="0"/>
+                        <a:cs typeface="DM Sans" charset="0"/>
+                      </a:endParaRPr>
+                    </a:p>
+                  </a:txBody>
+                  <a:tcPr marL="62230" marR="62230" marT="62230" marB="62230">
+                    <a:lnL w="12700" cap="flat" cmpd="sng" algn="ctr">
+                      <a:solidFill>
+                        <a:srgbClr val="B7B5B1"/>
+                      </a:solidFill>
+                      <a:prstDash val="solid"/>
+                      <a:round/>
+                      <a:headEnd type="none" w="med" len="med"/>
+                      <a:tailEnd type="none" w="med" len="med"/>
+                    </a:lnL>
+                    <a:lnR w="12700" cap="flat" cmpd="sng" algn="ctr">
+                      <a:solidFill>
+                        <a:srgbClr val="B7B5B1"/>
+                      </a:solidFill>
+                      <a:prstDash val="solid"/>
+                      <a:round/>
+                      <a:headEnd type="none" w="med" len="med"/>
+                      <a:tailEnd type="none" w="med" len="med"/>
+                    </a:lnR>
+                    <a:lnT w="12700" cap="flat" cmpd="sng" algn="ctr">
+                      <a:solidFill>
+                        <a:srgbClr val="C5C4BF"/>
+                      </a:solidFill>
+                      <a:prstDash val="solid"/>
+                      <a:round/>
+                      <a:headEnd type="none" w="med" len="med"/>
+                      <a:tailEnd type="none" w="med" len="med"/>
+                    </a:lnT>
+                    <a:lnB w="12700" cap="flat" cmpd="sng" algn="ctr">
+                      <a:solidFill>
+                        <a:srgbClr val="B7B5B1"/>
+                      </a:solidFill>
+                      <a:prstDash val="solid"/>
+                      <a:round/>
+                      <a:headEnd type="none" w="med" len="med"/>
+                      <a:tailEnd type="none" w="med" len="med"/>
+                    </a:lnB>
+                    <a:solidFill>
+                      <a:srgbClr val="E5E3DD"/>
+                    </a:solidFill>
+                  </a:tcPr>
+                </a:tc>
+                <a:tc>
+                  <a:txBody>
+                    <a:bodyPr/>
+                    <a:lstStyle/>
+                    <a:p>
+                      <a:pPr marL="0" indent="0">
+                        <a:lnSpc>
+                          <a:spcPts val="1960"/>
+                        </a:lnSpc>
+                        <a:buNone/>
+                      </a:pPr>
+                      <a:r>
+                        <a:rPr lang="en-US" sz="1400" b="1" dirty="0">
+                          <a:solidFill>
+                            <a:srgbClr val="1D1A33"/>
+                          </a:solidFill>
+                          <a:latin typeface="DM Sans" pitchFamily="34" charset="0"/>
+                          <a:ea typeface="DM Sans" pitchFamily="34" charset="-122"/>
+                          <a:cs typeface="DM Sans" pitchFamily="34" charset="-120"/>
+                        </a:rPr>
+                        <a:t>Prompts</a:t>
+                      </a:r>
+                      <a:endParaRPr lang="en-US" sz="1400" dirty="0">
+                        <a:latin typeface="DM Sans" charset="0"/>
+                        <a:ea typeface="DM Sans" charset="0"/>
+                        <a:cs typeface="DM Sans" charset="0"/>
+                      </a:endParaRPr>
+                    </a:p>
+                  </a:txBody>
+                  <a:tcPr marL="62230" marR="62230" marT="62230" marB="62230">
+                    <a:lnL w="12700" cap="flat" cmpd="sng" algn="ctr">
+                      <a:solidFill>
+                        <a:srgbClr val="B7B5B1"/>
+                      </a:solidFill>
+                      <a:prstDash val="solid"/>
+                      <a:round/>
+                      <a:headEnd type="none" w="med" len="med"/>
+                      <a:tailEnd type="none" w="med" len="med"/>
+                    </a:lnL>
+                    <a:lnR w="12700" cap="flat" cmpd="sng" algn="ctr">
+                      <a:solidFill>
+                        <a:srgbClr val="B7B5B1"/>
+                      </a:solidFill>
+                      <a:prstDash val="solid"/>
+                      <a:round/>
+                      <a:headEnd type="none" w="med" len="med"/>
+                      <a:tailEnd type="none" w="med" len="med"/>
+                    </a:lnR>
+                    <a:lnT w="12700" cap="flat" cmpd="sng" algn="ctr">
+                      <a:solidFill>
+                        <a:srgbClr val="C5C4BF"/>
+                      </a:solidFill>
+                      <a:prstDash val="solid"/>
+                      <a:round/>
+                      <a:headEnd type="none" w="med" len="med"/>
+                      <a:tailEnd type="none" w="med" len="med"/>
+                    </a:lnT>
+                    <a:lnB w="12700" cap="flat" cmpd="sng" algn="ctr">
+                      <a:solidFill>
+                        <a:srgbClr val="B7B5B1"/>
+                      </a:solidFill>
+                      <a:prstDash val="solid"/>
+                      <a:round/>
+                      <a:headEnd type="none" w="med" len="med"/>
+                      <a:tailEnd type="none" w="med" len="med"/>
+                    </a:lnB>
+                    <a:solidFill>
+                      <a:srgbClr val="E5E3DD"/>
+                    </a:solidFill>
+                  </a:tcPr>
+                </a:tc>
+                <a:extLst>
+                  <a:ext uri="{0D108BD9-81ED-4DB2-BD59-A6C34878D82A}">
+                    <a16:rowId xmlns:a16="http://schemas.microsoft.com/office/drawing/2014/main" val="10000"/>
+                  </a:ext>
+                </a:extLst>
+              </a:tr>
+              <a:tr h="386011">
+                <a:tc>
+                  <a:txBody>
+                    <a:bodyPr/>
+                    <a:lstStyle/>
+                    <a:p>
+                      <a:pPr marL="0" indent="0">
+                        <a:lnSpc>
+                          <a:spcPts val="1960"/>
+                        </a:lnSpc>
+                        <a:buNone/>
+                      </a:pPr>
+                      <a:r>
+                        <a:rPr lang="en-US" sz="1400" dirty="0">
+                          <a:solidFill>
+                            <a:srgbClr val="1D1A33"/>
+                          </a:solidFill>
+                          <a:latin typeface="DM Sans" pitchFamily="34" charset="0"/>
+                          <a:ea typeface="DM Sans" pitchFamily="34" charset="-122"/>
+                          <a:cs typeface="DM Sans" pitchFamily="34" charset="-120"/>
+                        </a:rPr>
+                        <a:t>Setup</a:t>
+                      </a:r>
+                      <a:endParaRPr lang="en-US" sz="1400" dirty="0">
+                        <a:latin typeface="DM Sans" charset="0"/>
+                        <a:ea typeface="DM Sans" charset="0"/>
+                        <a:cs typeface="DM Sans" charset="0"/>
+                      </a:endParaRPr>
+                    </a:p>
+                  </a:txBody>
+                  <a:tcPr marL="62230" marR="62230" marT="62230" marB="62230">
+                    <a:lnL w="12700" cap="flat" cmpd="sng" algn="ctr">
+                      <a:solidFill>
+                        <a:srgbClr val="C5C4BF"/>
+                      </a:solidFill>
+                      <a:prstDash val="solid"/>
+                      <a:round/>
+                      <a:headEnd type="none" w="med" len="med"/>
+                      <a:tailEnd type="none" w="med" len="med"/>
+                    </a:lnL>
+                    <a:lnR w="12700" cap="flat" cmpd="sng" algn="ctr">
+                      <a:solidFill>
+                        <a:srgbClr val="C5C4BF"/>
+                      </a:solidFill>
+                      <a:prstDash val="solid"/>
+                      <a:round/>
+                      <a:headEnd type="none" w="med" len="med"/>
+                      <a:tailEnd type="none" w="med" len="med"/>
+                    </a:lnR>
+                    <a:lnT w="12700" cap="flat" cmpd="sng" algn="ctr">
+                      <a:solidFill>
+                        <a:srgbClr val="B7B5B1"/>
+                      </a:solidFill>
+                      <a:prstDash val="solid"/>
+                      <a:round/>
+                      <a:headEnd type="none" w="med" len="med"/>
+                      <a:tailEnd type="none" w="med" len="med"/>
+                    </a:lnT>
+                    <a:lnB w="12700" cap="flat" cmpd="sng" algn="ctr">
+                      <a:solidFill>
+                        <a:srgbClr val="C5C4BF"/>
+                      </a:solidFill>
+                      <a:prstDash val="solid"/>
+                      <a:round/>
+                      <a:headEnd type="none" w="med" len="med"/>
+                      <a:tailEnd type="none" w="med" len="med"/>
+                    </a:lnB>
+                  </a:tcPr>
+                </a:tc>
+                <a:tc>
+                  <a:txBody>
+                    <a:bodyPr/>
+                    <a:lstStyle/>
+                    <a:p>
+                      <a:pPr marL="0" indent="0">
+                        <a:lnSpc>
+                          <a:spcPts val="1960"/>
+                        </a:lnSpc>
+                        <a:buNone/>
+                      </a:pPr>
+                      <a:r>
+                        <a:rPr lang="en-US" sz="1400" dirty="0">
+                          <a:solidFill>
+                            <a:srgbClr val="1D1A33"/>
+                          </a:solidFill>
+                          <a:latin typeface="DM Sans" pitchFamily="34" charset="0"/>
+                          <a:ea typeface="DM Sans" pitchFamily="34" charset="-122"/>
+                          <a:cs typeface="DM Sans" pitchFamily="34" charset="-120"/>
+                        </a:rPr>
+                        <a:t>Use prebuilt as is, or train on your data</a:t>
+                      </a:r>
+                      <a:endParaRPr lang="en-US" sz="1400" dirty="0">
+                        <a:latin typeface="DM Sans" charset="0"/>
+                        <a:ea typeface="DM Sans" charset="0"/>
+                        <a:cs typeface="DM Sans" charset="0"/>
+                      </a:endParaRPr>
+                    </a:p>
+                  </a:txBody>
+                  <a:tcPr marL="62230" marR="62230" marT="62230" marB="62230">
+                    <a:lnL w="12700" cap="flat" cmpd="sng" algn="ctr">
+                      <a:solidFill>
+                        <a:srgbClr val="C5C4BF"/>
+                      </a:solidFill>
+                      <a:prstDash val="solid"/>
+                      <a:round/>
+                      <a:headEnd type="none" w="med" len="med"/>
+                      <a:tailEnd type="none" w="med" len="med"/>
+                    </a:lnL>
+                    <a:lnR w="12700" cap="flat" cmpd="sng" algn="ctr">
+                      <a:solidFill>
+                        <a:srgbClr val="C5C4BF"/>
+                      </a:solidFill>
+                      <a:prstDash val="solid"/>
+                      <a:round/>
+                      <a:headEnd type="none" w="med" len="med"/>
+                      <a:tailEnd type="none" w="med" len="med"/>
+                    </a:lnR>
+                    <a:lnT w="12700" cap="flat" cmpd="sng" algn="ctr">
+                      <a:solidFill>
+                        <a:srgbClr val="B7B5B1"/>
+                      </a:solidFill>
+                      <a:prstDash val="solid"/>
+                      <a:round/>
+                      <a:headEnd type="none" w="med" len="med"/>
+                      <a:tailEnd type="none" w="med" len="med"/>
+                    </a:lnT>
+                    <a:lnB w="12700" cap="flat" cmpd="sng" algn="ctr">
+                      <a:solidFill>
+                        <a:srgbClr val="C5C4BF"/>
+                      </a:solidFill>
+                      <a:prstDash val="solid"/>
+                      <a:round/>
+                      <a:headEnd type="none" w="med" len="med"/>
+                      <a:tailEnd type="none" w="med" len="med"/>
+                    </a:lnB>
+                  </a:tcPr>
+                </a:tc>
+                <a:tc>
+                  <a:txBody>
+                    <a:bodyPr/>
+                    <a:lstStyle/>
+                    <a:p>
+                      <a:pPr marL="0" indent="0">
+                        <a:lnSpc>
+                          <a:spcPts val="1960"/>
+                        </a:lnSpc>
+                        <a:buNone/>
+                      </a:pPr>
+                      <a:r>
+                        <a:rPr lang="en-US" sz="1400" dirty="0">
+                          <a:solidFill>
+                            <a:srgbClr val="1D1A33"/>
+                          </a:solidFill>
+                          <a:latin typeface="DM Sans" pitchFamily="34" charset="0"/>
+                          <a:ea typeface="DM Sans" pitchFamily="34" charset="-122"/>
+                          <a:cs typeface="DM Sans" pitchFamily="34" charset="-120"/>
+                        </a:rPr>
+                        <a:t>Write plain-language instructions, no training</a:t>
+                      </a:r>
+                      <a:endParaRPr lang="en-US" sz="1400" dirty="0">
+                        <a:latin typeface="DM Sans" charset="0"/>
+                        <a:ea typeface="DM Sans" charset="0"/>
+                        <a:cs typeface="DM Sans" charset="0"/>
+                      </a:endParaRPr>
+                    </a:p>
+                  </a:txBody>
+                  <a:tcPr marL="62230" marR="62230" marT="62230" marB="62230">
+                    <a:lnL w="12700" cap="flat" cmpd="sng" algn="ctr">
+                      <a:solidFill>
+                        <a:srgbClr val="C5C4BF"/>
+                      </a:solidFill>
+                      <a:prstDash val="solid"/>
+                      <a:round/>
+                      <a:headEnd type="none" w="med" len="med"/>
+                      <a:tailEnd type="none" w="med" len="med"/>
+                    </a:lnL>
+                    <a:lnR w="12700" cap="flat" cmpd="sng" algn="ctr">
+                      <a:solidFill>
+                        <a:srgbClr val="C5C4BF"/>
+                      </a:solidFill>
+                      <a:prstDash val="solid"/>
+                      <a:round/>
+                      <a:headEnd type="none" w="med" len="med"/>
+                      <a:tailEnd type="none" w="med" len="med"/>
+                    </a:lnR>
+                    <a:lnT w="12700" cap="flat" cmpd="sng" algn="ctr">
+                      <a:solidFill>
+                        <a:srgbClr val="B7B5B1"/>
+                      </a:solidFill>
+                      <a:prstDash val="solid"/>
+                      <a:round/>
+                      <a:headEnd type="none" w="med" len="med"/>
+                      <a:tailEnd type="none" w="med" len="med"/>
+                    </a:lnT>
+                    <a:lnB w="12700" cap="flat" cmpd="sng" algn="ctr">
+                      <a:solidFill>
+                        <a:srgbClr val="C5C4BF"/>
+                      </a:solidFill>
+                      <a:prstDash val="solid"/>
+                      <a:round/>
+                      <a:headEnd type="none" w="med" len="med"/>
+                      <a:tailEnd type="none" w="med" len="med"/>
+                    </a:lnB>
+                  </a:tcPr>
+                </a:tc>
+                <a:extLst>
+                  <a:ext uri="{0D108BD9-81ED-4DB2-BD59-A6C34878D82A}">
+                    <a16:rowId xmlns:a16="http://schemas.microsoft.com/office/drawing/2014/main" val="10001"/>
+                  </a:ext>
+                </a:extLst>
+              </a:tr>
+              <a:tr h="634901">
+                <a:tc>
+                  <a:txBody>
+                    <a:bodyPr/>
+                    <a:lstStyle/>
+                    <a:p>
+                      <a:pPr marL="0" indent="0">
+                        <a:lnSpc>
+                          <a:spcPts val="1960"/>
+                        </a:lnSpc>
+                        <a:buNone/>
+                      </a:pPr>
+                      <a:r>
+                        <a:rPr lang="en-US" sz="1400" dirty="0">
+                          <a:solidFill>
+                            <a:srgbClr val="1D1A33"/>
+                          </a:solidFill>
+                          <a:latin typeface="DM Sans" pitchFamily="34" charset="0"/>
+                          <a:ea typeface="DM Sans" pitchFamily="34" charset="-122"/>
+                          <a:cs typeface="DM Sans" pitchFamily="34" charset="-120"/>
+                        </a:rPr>
+                        <a:t>Best for</a:t>
+                      </a:r>
+                      <a:endParaRPr lang="en-US" sz="1400" dirty="0">
+                        <a:latin typeface="DM Sans" charset="0"/>
+                        <a:ea typeface="DM Sans" charset="0"/>
+                        <a:cs typeface="DM Sans" charset="0"/>
+                      </a:endParaRPr>
+                    </a:p>
+                  </a:txBody>
+                  <a:tcPr marL="62230" marR="62230" marT="62230" marB="62230">
+                    <a:lnL w="12700" cap="flat" cmpd="sng" algn="ctr">
+                      <a:solidFill>
+                        <a:srgbClr val="C5C4BF"/>
+                      </a:solidFill>
+                      <a:prstDash val="solid"/>
+                      <a:round/>
+                      <a:headEnd type="none" w="med" len="med"/>
+                      <a:tailEnd type="none" w="med" len="med"/>
+                    </a:lnL>
+                    <a:lnR w="12700" cap="flat" cmpd="sng" algn="ctr">
+                      <a:solidFill>
+                        <a:srgbClr val="C5C4BF"/>
+                      </a:solidFill>
+                      <a:prstDash val="solid"/>
+                      <a:round/>
+                      <a:headEnd type="none" w="med" len="med"/>
+                      <a:tailEnd type="none" w="med" len="med"/>
+                    </a:lnR>
+                    <a:lnT w="12700" cap="flat" cmpd="sng" algn="ctr">
+                      <a:solidFill>
+                        <a:srgbClr val="C5C4BF"/>
+                      </a:solidFill>
+                      <a:prstDash val="solid"/>
+                      <a:round/>
+                      <a:headEnd type="none" w="med" len="med"/>
+                      <a:tailEnd type="none" w="med" len="med"/>
+                    </a:lnT>
+                    <a:lnB w="12700" cap="flat" cmpd="sng" algn="ctr">
+                      <a:solidFill>
+                        <a:srgbClr val="C5C4BF"/>
+                      </a:solidFill>
+                      <a:prstDash val="solid"/>
+                      <a:round/>
+                      <a:headEnd type="none" w="med" len="med"/>
+                      <a:tailEnd type="none" w="med" len="med"/>
+                    </a:lnB>
+                  </a:tcPr>
+                </a:tc>
+                <a:tc>
+                  <a:txBody>
+                    <a:bodyPr/>
+                    <a:lstStyle/>
+                    <a:p>
+                      <a:pPr marL="0" indent="0">
+                        <a:lnSpc>
+                          <a:spcPts val="1960"/>
+                        </a:lnSpc>
+                        <a:buNone/>
+                      </a:pPr>
+                      <a:r>
+                        <a:rPr lang="en-US" sz="1400" dirty="0">
+                          <a:solidFill>
+                            <a:srgbClr val="1D1A33"/>
+                          </a:solidFill>
+                          <a:latin typeface="DM Sans" pitchFamily="34" charset="0"/>
+                          <a:ea typeface="DM Sans" pitchFamily="34" charset="-122"/>
+                          <a:cs typeface="DM Sans" pitchFamily="34" charset="-120"/>
+                        </a:rPr>
+                        <a:t>Production work that needs accuracy and repeatability, such as invoices</a:t>
+                      </a:r>
+                      <a:endParaRPr lang="en-US" sz="1400" dirty="0">
+                        <a:latin typeface="DM Sans" charset="0"/>
+                        <a:ea typeface="DM Sans" charset="0"/>
+                        <a:cs typeface="DM Sans" charset="0"/>
+                      </a:endParaRPr>
+                    </a:p>
+                  </a:txBody>
+                  <a:tcPr marL="62230" marR="62230" marT="62230" marB="62230">
+                    <a:lnL w="12700" cap="flat" cmpd="sng" algn="ctr">
+                      <a:solidFill>
+                        <a:srgbClr val="C5C4BF"/>
+                      </a:solidFill>
+                      <a:prstDash val="solid"/>
+                      <a:round/>
+                      <a:headEnd type="none" w="med" len="med"/>
+                      <a:tailEnd type="none" w="med" len="med"/>
+                    </a:lnL>
+                    <a:lnR w="12700" cap="flat" cmpd="sng" algn="ctr">
+                      <a:solidFill>
+                        <a:srgbClr val="C5C4BF"/>
+                      </a:solidFill>
+                      <a:prstDash val="solid"/>
+                      <a:round/>
+                      <a:headEnd type="none" w="med" len="med"/>
+                      <a:tailEnd type="none" w="med" len="med"/>
+                    </a:lnR>
+                    <a:lnT w="12700" cap="flat" cmpd="sng" algn="ctr">
+                      <a:solidFill>
+                        <a:srgbClr val="C5C4BF"/>
+                      </a:solidFill>
+                      <a:prstDash val="solid"/>
+                      <a:round/>
+                      <a:headEnd type="none" w="med" len="med"/>
+                      <a:tailEnd type="none" w="med" len="med"/>
+                    </a:lnT>
+                    <a:lnB w="12700" cap="flat" cmpd="sng" algn="ctr">
+                      <a:solidFill>
+                        <a:srgbClr val="C5C4BF"/>
+                      </a:solidFill>
+                      <a:prstDash val="solid"/>
+                      <a:round/>
+                      <a:headEnd type="none" w="med" len="med"/>
+                      <a:tailEnd type="none" w="med" len="med"/>
+                    </a:lnB>
+                  </a:tcPr>
+                </a:tc>
+                <a:tc>
+                  <a:txBody>
+                    <a:bodyPr/>
+                    <a:lstStyle/>
+                    <a:p>
+                      <a:pPr marL="0" indent="0">
+                        <a:lnSpc>
+                          <a:spcPts val="1960"/>
+                        </a:lnSpc>
+                        <a:buNone/>
+                      </a:pPr>
+                      <a:r>
+                        <a:rPr lang="en-US" sz="1400" dirty="0">
+                          <a:solidFill>
+                            <a:srgbClr val="1D1A33"/>
+                          </a:solidFill>
+                          <a:latin typeface="DM Sans" pitchFamily="34" charset="0"/>
+                          <a:ea typeface="DM Sans" pitchFamily="34" charset="-122"/>
+                          <a:cs typeface="DM Sans" pitchFamily="34" charset="-120"/>
+                        </a:rPr>
+                        <a:t>Flexible tasks such as extraction, summaries and drafting</a:t>
+                      </a:r>
+                      <a:endParaRPr lang="en-US" sz="1400" dirty="0">
+                        <a:latin typeface="DM Sans" charset="0"/>
+                        <a:ea typeface="DM Sans" charset="0"/>
+                        <a:cs typeface="DM Sans" charset="0"/>
+                      </a:endParaRPr>
+                    </a:p>
+                  </a:txBody>
+                  <a:tcPr marL="62230" marR="62230" marT="62230" marB="62230">
+                    <a:lnL w="12700" cap="flat" cmpd="sng" algn="ctr">
+                      <a:solidFill>
+                        <a:srgbClr val="C5C4BF"/>
+                      </a:solidFill>
+                      <a:prstDash val="solid"/>
+                      <a:round/>
+                      <a:headEnd type="none" w="med" len="med"/>
+                      <a:tailEnd type="none" w="med" len="med"/>
+                    </a:lnL>
+                    <a:lnR w="12700" cap="flat" cmpd="sng" algn="ctr">
+                      <a:solidFill>
+                        <a:srgbClr val="C5C4BF"/>
+                      </a:solidFill>
+                      <a:prstDash val="solid"/>
+                      <a:round/>
+                      <a:headEnd type="none" w="med" len="med"/>
+                      <a:tailEnd type="none" w="med" len="med"/>
+                    </a:lnR>
+                    <a:lnT w="12700" cap="flat" cmpd="sng" algn="ctr">
+                      <a:solidFill>
+                        <a:srgbClr val="C5C4BF"/>
+                      </a:solidFill>
+                      <a:prstDash val="solid"/>
+                      <a:round/>
+                      <a:headEnd type="none" w="med" len="med"/>
+                      <a:tailEnd type="none" w="med" len="med"/>
+                    </a:lnT>
+                    <a:lnB w="12700" cap="flat" cmpd="sng" algn="ctr">
+                      <a:solidFill>
+                        <a:srgbClr val="C5C4BF"/>
+                      </a:solidFill>
+                      <a:prstDash val="solid"/>
+                      <a:round/>
+                      <a:headEnd type="none" w="med" len="med"/>
+                      <a:tailEnd type="none" w="med" len="med"/>
+                    </a:lnB>
+                  </a:tcPr>
+                </a:tc>
+                <a:extLst>
+                  <a:ext uri="{0D108BD9-81ED-4DB2-BD59-A6C34878D82A}">
+                    <a16:rowId xmlns:a16="http://schemas.microsoft.com/office/drawing/2014/main" val="10002"/>
+                  </a:ext>
+                </a:extLst>
+              </a:tr>
+              <a:tr h="386011">
+                <a:tc>
+                  <a:txBody>
+                    <a:bodyPr/>
+                    <a:lstStyle/>
+                    <a:p>
+                      <a:pPr marL="0" indent="0">
+                        <a:lnSpc>
+                          <a:spcPts val="1960"/>
+                        </a:lnSpc>
+                        <a:buNone/>
+                      </a:pPr>
+                      <a:r>
+                        <a:rPr lang="en-US" sz="1400" dirty="0">
+                          <a:solidFill>
+                            <a:srgbClr val="1D1A33"/>
+                          </a:solidFill>
+                          <a:latin typeface="DM Sans" pitchFamily="34" charset="0"/>
+                          <a:ea typeface="DM Sans" pitchFamily="34" charset="-122"/>
+                          <a:cs typeface="DM Sans" pitchFamily="34" charset="-120"/>
+                        </a:rPr>
+                        <a:t>Watch for</a:t>
+                      </a:r>
+                      <a:endParaRPr lang="en-US" sz="1400" dirty="0">
+                        <a:latin typeface="DM Sans" charset="0"/>
+                        <a:ea typeface="DM Sans" charset="0"/>
+                        <a:cs typeface="DM Sans" charset="0"/>
+                      </a:endParaRPr>
+                    </a:p>
+                  </a:txBody>
+                  <a:tcPr marL="62230" marR="62230" marT="62230" marB="62230">
+                    <a:lnL w="12700" cap="flat" cmpd="sng" algn="ctr">
+                      <a:solidFill>
+                        <a:srgbClr val="C5C4BF"/>
+                      </a:solidFill>
+                      <a:prstDash val="solid"/>
+                      <a:round/>
+                      <a:headEnd type="none" w="med" len="med"/>
+                      <a:tailEnd type="none" w="med" len="med"/>
+                    </a:lnL>
+                    <a:lnR w="12700" cap="flat" cmpd="sng" algn="ctr">
+                      <a:solidFill>
+                        <a:srgbClr val="C5C4BF"/>
+                      </a:solidFill>
+                      <a:prstDash val="solid"/>
+                      <a:round/>
+                      <a:headEnd type="none" w="med" len="med"/>
+                      <a:tailEnd type="none" w="med" len="med"/>
+                    </a:lnR>
+                    <a:lnT w="12700" cap="flat" cmpd="sng" algn="ctr">
+                      <a:solidFill>
+                        <a:srgbClr val="C5C4BF"/>
+                      </a:solidFill>
+                      <a:prstDash val="solid"/>
+                      <a:round/>
+                      <a:headEnd type="none" w="med" len="med"/>
+                      <a:tailEnd type="none" w="med" len="med"/>
+                    </a:lnT>
+                    <a:lnB w="12700" cap="flat" cmpd="sng" algn="ctr">
+                      <a:solidFill>
+                        <a:srgbClr val="C5C4BF"/>
+                      </a:solidFill>
+                      <a:prstDash val="solid"/>
+                      <a:round/>
+                      <a:headEnd type="none" w="med" len="med"/>
+                      <a:tailEnd type="none" w="med" len="med"/>
+                    </a:lnB>
+                  </a:tcPr>
+                </a:tc>
+                <a:tc>
+                  <a:txBody>
+                    <a:bodyPr/>
+                    <a:lstStyle/>
+                    <a:p>
+                      <a:pPr marL="0" indent="0">
+                        <a:lnSpc>
+                          <a:spcPts val="1960"/>
+                        </a:lnSpc>
+                        <a:buNone/>
+                      </a:pPr>
+                      <a:r>
+                        <a:rPr lang="en-US" sz="1400" dirty="0">
+                          <a:solidFill>
+                            <a:srgbClr val="1D1A33"/>
+                          </a:solidFill>
+                          <a:latin typeface="DM Sans" pitchFamily="34" charset="0"/>
+                          <a:ea typeface="DM Sans" pitchFamily="34" charset="-122"/>
+                          <a:cs typeface="DM Sans" pitchFamily="34" charset="-120"/>
+                        </a:rPr>
+                        <a:t>Training data and effort for custom models</a:t>
+                      </a:r>
+                      <a:endParaRPr lang="en-US" sz="1400" dirty="0">
+                        <a:latin typeface="DM Sans" charset="0"/>
+                        <a:ea typeface="DM Sans" charset="0"/>
+                        <a:cs typeface="DM Sans" charset="0"/>
+                      </a:endParaRPr>
+                    </a:p>
+                  </a:txBody>
+                  <a:tcPr marL="62230" marR="62230" marT="62230" marB="62230">
+                    <a:lnL w="12700" cap="flat" cmpd="sng" algn="ctr">
+                      <a:solidFill>
+                        <a:srgbClr val="C5C4BF"/>
+                      </a:solidFill>
+                      <a:prstDash val="solid"/>
+                      <a:round/>
+                      <a:headEnd type="none" w="med" len="med"/>
+                      <a:tailEnd type="none" w="med" len="med"/>
+                    </a:lnL>
+                    <a:lnR w="12700" cap="flat" cmpd="sng" algn="ctr">
+                      <a:solidFill>
+                        <a:srgbClr val="C5C4BF"/>
+                      </a:solidFill>
+                      <a:prstDash val="solid"/>
+                      <a:round/>
+                      <a:headEnd type="none" w="med" len="med"/>
+                      <a:tailEnd type="none" w="med" len="med"/>
+                    </a:lnR>
+                    <a:lnT w="12700" cap="flat" cmpd="sng" algn="ctr">
+                      <a:solidFill>
+                        <a:srgbClr val="C5C4BF"/>
+                      </a:solidFill>
+                      <a:prstDash val="solid"/>
+                      <a:round/>
+                      <a:headEnd type="none" w="med" len="med"/>
+                      <a:tailEnd type="none" w="med" len="med"/>
+                    </a:lnT>
+                    <a:lnB w="12700" cap="flat" cmpd="sng" algn="ctr">
+                      <a:solidFill>
+                        <a:srgbClr val="C5C4BF"/>
+                      </a:solidFill>
+                      <a:prstDash val="solid"/>
+                      <a:round/>
+                      <a:headEnd type="none" w="med" len="med"/>
+                      <a:tailEnd type="none" w="med" len="med"/>
+                    </a:lnB>
+                  </a:tcPr>
+                </a:tc>
+                <a:tc>
+                  <a:txBody>
+                    <a:bodyPr/>
+                    <a:lstStyle/>
+                    <a:p>
+                      <a:pPr marL="0" indent="0">
+                        <a:lnSpc>
+                          <a:spcPts val="1960"/>
+                        </a:lnSpc>
+                        <a:buNone/>
+                      </a:pPr>
+                      <a:r>
+                        <a:rPr lang="en-US" sz="1400" dirty="0">
+                          <a:solidFill>
+                            <a:srgbClr val="1D1A33"/>
+                          </a:solidFill>
+                          <a:latin typeface="DM Sans" pitchFamily="34" charset="0"/>
+                          <a:ea typeface="DM Sans" pitchFamily="34" charset="-122"/>
+                          <a:cs typeface="DM Sans" pitchFamily="34" charset="-120"/>
+                        </a:rPr>
+                        <a:t>Variable output, so add examples and validate</a:t>
+                      </a:r>
+                      <a:endParaRPr lang="en-US" sz="1400" dirty="0">
+                        <a:latin typeface="DM Sans" charset="0"/>
+                        <a:ea typeface="DM Sans" charset="0"/>
+                        <a:cs typeface="DM Sans" charset="0"/>
+                      </a:endParaRPr>
+                    </a:p>
+                  </a:txBody>
+                  <a:tcPr marL="62230" marR="62230" marT="62230" marB="62230">
+                    <a:lnL w="12700" cap="flat" cmpd="sng" algn="ctr">
+                      <a:solidFill>
+                        <a:srgbClr val="C5C4BF"/>
+                      </a:solidFill>
+                      <a:prstDash val="solid"/>
+                      <a:round/>
+                      <a:headEnd type="none" w="med" len="med"/>
+                      <a:tailEnd type="none" w="med" len="med"/>
+                    </a:lnL>
+                    <a:lnR w="12700" cap="flat" cmpd="sng" algn="ctr">
+                      <a:solidFill>
+                        <a:srgbClr val="C5C4BF"/>
+                      </a:solidFill>
+                      <a:prstDash val="solid"/>
+                      <a:round/>
+                      <a:headEnd type="none" w="med" len="med"/>
+                      <a:tailEnd type="none" w="med" len="med"/>
+                    </a:lnR>
+                    <a:lnT w="12700" cap="flat" cmpd="sng" algn="ctr">
+                      <a:solidFill>
+                        <a:srgbClr val="C5C4BF"/>
+                      </a:solidFill>
+                      <a:prstDash val="solid"/>
+                      <a:round/>
+                      <a:headEnd type="none" w="med" len="med"/>
+                      <a:tailEnd type="none" w="med" len="med"/>
+                    </a:lnT>
+                    <a:lnB w="12700" cap="flat" cmpd="sng" algn="ctr">
+                      <a:solidFill>
+                        <a:srgbClr val="C5C4BF"/>
+                      </a:solidFill>
+                      <a:prstDash val="solid"/>
+                      <a:round/>
+                      <a:headEnd type="none" w="med" len="med"/>
+                      <a:tailEnd type="none" w="med" len="med"/>
+                    </a:lnB>
+                  </a:tcPr>
+                </a:tc>
+                <a:extLst>
+                  <a:ext uri="{0D108BD9-81ED-4DB2-BD59-A6C34878D82A}">
+                    <a16:rowId xmlns:a16="http://schemas.microsoft.com/office/drawing/2014/main" val="10003"/>
+                  </a:ext>
+                </a:extLst>
+              </a:tr>
+            </a:tbl>
+          </a:graphicData>
+        </a:graphic>
+      </p:graphicFrame>
+    </p:spTree>
+  </p:cSld>
+  <p:clrMapOvr>
+    <a:masterClrMapping/>
+  </p:clrMapOvr>
+</p:sld>
+</file>
+
+<file path=ppt/slides/slide11.xml><?xml version="1.0" encoding="utf-8"?>
+<p:sld xmlns:a="http://schemas.openxmlformats.org/drawingml/2006/main" xmlns:r="http://schemas.openxmlformats.org/officeDocument/2006/relationships" xmlns:p="http://schemas.openxmlformats.org/presentationml/2006/main">
+  <p:cSld>
+    <p:bg>
+      <p:bgPr>
+        <a:solidFill>
+          <a:srgbClr val="F7F5EF"/>
+        </a:solidFill>
+        <a:effectLst/>
+      </p:bgPr>
+    </p:bg>
+    <p:spTree>
+      <p:nvGrpSpPr>
+        <p:cNvPr id="1" name=""/>
+        <p:cNvGrpSpPr/>
+        <p:nvPr/>
+      </p:nvGrpSpPr>
+      <p:grpSpPr>
+        <a:xfrm>
+          <a:off x="0" y="0"/>
+          <a:ext cx="0" cy="0"/>
+          <a:chOff x="0" y="0"/>
+          <a:chExt cx="0" cy="0"/>
+        </a:xfrm>
+      </p:grpSpPr>
+      <p:sp>
+        <p:nvSpPr>
+          <p:cNvPr id="2" name="Text 0"/>
+          <p:cNvSpPr/>
+          <p:nvPr/>
+        </p:nvSpPr>
+        <p:spPr>
+          <a:xfrm>
+            <a:off x="812800" y="812800"/>
+            <a:ext cx="10883392" cy="238720"/>
+          </a:xfrm>
+          <a:prstGeom prst="rect">
+            <a:avLst/>
+          </a:prstGeom>
+          <a:noFill/>
+          <a:ln/>
+        </p:spPr>
+        <p:txBody>
+          <a:bodyPr wrap="square" lIns="0" tIns="0" rIns="0" bIns="0" rtlCol="0" anchor="t">
+            <a:normAutofit/>
+          </a:bodyPr>
+          <a:lstStyle/>
+          <a:p>
+            <a:pPr marL="0" marR="0" lvl="0" indent="0" algn="l" defTabSz="914400" rtl="0" eaLnBrk="1" fontAlgn="auto" latinLnBrk="0" hangingPunct="1">
+              <a:lnSpc>
+                <a:spcPts val="1680"/>
+              </a:lnSpc>
+              <a:spcBef>
+                <a:spcPts val="0"/>
+              </a:spcBef>
+              <a:spcAft>
+                <a:spcPts val="0"/>
+              </a:spcAft>
+              <a:buClrTx/>
+              <a:buSzTx/>
+              <a:buFontTx/>
+              <a:buNone/>
+              <a:tabLst/>
+              <a:defRPr/>
+            </a:pPr>
+            <a:r>
+              <a:rPr kumimoji="0" lang="en-US" sz="1200" b="1" i="0" u="none" strike="noStrike" kern="0" cap="none" spc="150" normalizeH="0" baseline="0" noProof="0" dirty="0">
+                <a:ln>
+                  <a:noFill/>
+                </a:ln>
+                <a:solidFill>
+                  <a:srgbClr val="5A45D1"/>
+                </a:solidFill>
+                <a:effectLst/>
+                <a:uLnTx/>
+                <a:uFillTx/>
+                <a:latin typeface="DM Sans" pitchFamily="34" charset="0"/>
+                <a:ea typeface="DM Sans" pitchFamily="34" charset="-122"/>
+                <a:cs typeface="DM Sans" pitchFamily="34" charset="-120"/>
+              </a:rPr>
               <a:t>EXAMPLE</a:t>
             </a:r>
             <a:endParaRPr kumimoji="0" lang="en-US" sz="1200" b="0" i="0" u="none" strike="noStrike" kern="1200" cap="none" spc="0" normalizeH="0" baseline="0" noProof="0" dirty="0">
@@ -11587,7 +12521,7 @@
 </p:sld>
 </file>
 
-<file path=ppt/slides/slide11.xml><?xml version="1.0" encoding="utf-8"?>
+<file path=ppt/slides/slide12.xml><?xml version="1.0" encoding="utf-8"?>
 <p:sld xmlns:a="http://schemas.openxmlformats.org/drawingml/2006/main" xmlns:r="http://schemas.openxmlformats.org/officeDocument/2006/relationships" xmlns:p="http://schemas.openxmlformats.org/presentationml/2006/main">
   <p:cSld>
     <p:bg>
@@ -12548,7 +13482,7 @@
 </p:sld>
 </file>
 
-<file path=ppt/slides/slide12.xml><?xml version="1.0" encoding="utf-8"?>
+<file path=ppt/slides/slide13.xml><?xml version="1.0" encoding="utf-8"?>
 <p:sld xmlns:a="http://schemas.openxmlformats.org/drawingml/2006/main" xmlns:r="http://schemas.openxmlformats.org/officeDocument/2006/relationships" xmlns:p="http://schemas.openxmlformats.org/presentationml/2006/main">
   <p:cSld>
     <p:bg>
@@ -13431,7 +14365,7 @@
 </p:sld>
 </file>
 
-<file path=ppt/slides/slide13.xml><?xml version="1.0" encoding="utf-8"?>
+<file path=ppt/slides/slide14.xml><?xml version="1.0" encoding="utf-8"?>
 <p:sld xmlns:a="http://schemas.openxmlformats.org/drawingml/2006/main" xmlns:r="http://schemas.openxmlformats.org/officeDocument/2006/relationships" xmlns:p="http://schemas.openxmlformats.org/presentationml/2006/main">
   <p:cSld>
     <p:bg>
@@ -13860,7 +14794,7 @@
 </p:sld>
 </file>
 
-<file path=ppt/slides/slide14.xml><?xml version="1.0" encoding="utf-8"?>
+<file path=ppt/slides/slide15.xml><?xml version="1.0" encoding="utf-8"?>
 <p:sld xmlns:a="http://schemas.openxmlformats.org/drawingml/2006/main" xmlns:r="http://schemas.openxmlformats.org/officeDocument/2006/relationships" xmlns:p="http://schemas.openxmlformats.org/presentationml/2006/main">
   <p:cSld>
     <p:bg>
@@ -14236,7 +15170,7 @@
 </p:sld>
 </file>
 
-<file path=ppt/slides/slide15.xml><?xml version="1.0" encoding="utf-8"?>
+<file path=ppt/slides/slide16.xml><?xml version="1.0" encoding="utf-8"?>
 <p:sld xmlns:a="http://schemas.openxmlformats.org/drawingml/2006/main" xmlns:r="http://schemas.openxmlformats.org/officeDocument/2006/relationships" xmlns:p="http://schemas.openxmlformats.org/presentationml/2006/main">
   <p:cSld>
     <p:spTree>
@@ -15749,6 +16683,66 @@
 </file>
 
 <file path=ppt/slides/slide5.xml><?xml version="1.0" encoding="utf-8"?>
+<p:sld xmlns:a="http://schemas.openxmlformats.org/drawingml/2006/main" xmlns:r="http://schemas.openxmlformats.org/officeDocument/2006/relationships" xmlns:p="http://schemas.openxmlformats.org/presentationml/2006/main">
+  <p:cSld>
+    <p:spTree>
+      <p:nvGrpSpPr>
+        <p:cNvPr id="1" name=""/>
+        <p:cNvGrpSpPr/>
+        <p:nvPr/>
+      </p:nvGrpSpPr>
+      <p:grpSpPr>
+        <a:xfrm>
+          <a:off x="0" y="0"/>
+          <a:ext cx="0" cy="0"/>
+          <a:chOff x="0" y="0"/>
+          <a:chExt cx="0" cy="0"/>
+        </a:xfrm>
+      </p:grpSpPr>
+      <p:pic>
+        <p:nvPicPr>
+          <p:cNvPr id="5" name="Picture 4">
+            <a:extLst>
+              <a:ext uri="{FF2B5EF4-FFF2-40B4-BE49-F238E27FC236}">
+                <a16:creationId xmlns:a16="http://schemas.microsoft.com/office/drawing/2014/main" id="{0C8C7931-518A-C091-DED7-851DF9ED915B}"/>
+              </a:ext>
+            </a:extLst>
+          </p:cNvPr>
+          <p:cNvPicPr>
+            <a:picLocks noChangeAspect="1"/>
+          </p:cNvPicPr>
+          <p:nvPr/>
+        </p:nvPicPr>
+        <p:blipFill>
+          <a:blip r:embed="rId2"/>
+          <a:stretch>
+            <a:fillRect/>
+          </a:stretch>
+        </p:blipFill>
+        <p:spPr>
+          <a:xfrm>
+            <a:off x="672891" y="0"/>
+            <a:ext cx="10846217" cy="6858000"/>
+          </a:xfrm>
+          <a:prstGeom prst="rect">
+            <a:avLst/>
+          </a:prstGeom>
+        </p:spPr>
+      </p:pic>
+    </p:spTree>
+    <p:extLst>
+      <p:ext uri="{BB962C8B-B14F-4D97-AF65-F5344CB8AC3E}">
+        <p14:creationId xmlns:p14="http://schemas.microsoft.com/office/powerpoint/2010/main" val="1180975732"/>
+      </p:ext>
+    </p:extLst>
+  </p:cSld>
+  <p:clrMapOvr>
+    <a:masterClrMapping/>
+  </p:clrMapOvr>
+</p:sld>
+</file>
+
+<file path=ppt/slides/slide6.xml><?xml version="1.0" encoding="utf-8"?>
 <p:sld xmlns:a="http://schemas.openxmlformats.org/drawingml/2006/main" xmlns:r="http://schemas.openxmlformats.org/officeDocument/2006/relationships" xmlns:p="http://schemas.openxmlformats.org/presentationml/2006/main">
   <p:cSld>
     <p:bg>
@@ -17010,7 +18004,7 @@
 </p:sld>
 </file>
 
-<file path=ppt/slides/slide6.xml><?xml version="1.0" encoding="utf-8"?>
+<file path=ppt/slides/slide7.xml><?xml version="1.0" encoding="utf-8"?>
 <p:sld xmlns:a="http://schemas.openxmlformats.org/drawingml/2006/main" xmlns:r="http://schemas.openxmlformats.org/officeDocument/2006/relationships" xmlns:p="http://schemas.openxmlformats.org/presentationml/2006/main">
   <p:cSld>
     <p:bg>
@@ -17768,7 +18762,7 @@
 </p:sld>
 </file>
 
-<file path=ppt/slides/slide7.xml><?xml version="1.0" encoding="utf-8"?>
+<file path=ppt/slides/slide8.xml><?xml version="1.0" encoding="utf-8"?>
 <p:sld xmlns:a="http://schemas.openxmlformats.org/drawingml/2006/main" xmlns:r="http://schemas.openxmlformats.org/officeDocument/2006/relationships" xmlns:p="http://schemas.openxmlformats.org/presentationml/2006/main">
   <p:cSld>
     <p:bg>
@@ -18524,7 +19518,7 @@
 </p:sld>
 </file>
 
-<file path=ppt/slides/slide8.xml><?xml version="1.0" encoding="utf-8"?>
+<file path=ppt/slides/slide9.xml><?xml version="1.0" encoding="utf-8"?>
 <p:sld xmlns:a="http://schemas.openxmlformats.org/drawingml/2006/main" xmlns:r="http://schemas.openxmlformats.org/officeDocument/2006/relationships" xmlns:p="http://schemas.openxmlformats.org/presentationml/2006/main">
   <p:cSld>
     <p:bg>
@@ -19695,1046 +20689,6 @@
           </a:p>
         </p:txBody>
       </p:sp>
-    </p:spTree>
-  </p:cSld>
-  <p:clrMapOvr>
-    <a:masterClrMapping/>
-  </p:clrMapOvr>
-</p:sld>
-</file>
-
-<file path=ppt/slides/slide9.xml><?xml version="1.0" encoding="utf-8"?>
-<p:sld xmlns:a="http://schemas.openxmlformats.org/drawingml/2006/main" xmlns:r="http://schemas.openxmlformats.org/officeDocument/2006/relationships" xmlns:p="http://schemas.openxmlformats.org/presentationml/2006/main">
-  <p:cSld>
-    <p:bg>
-      <p:bgPr>
-        <a:solidFill>
-          <a:srgbClr val="F7F5EF"/>
-        </a:solidFill>
-        <a:effectLst/>
-      </p:bgPr>
-    </p:bg>
-    <p:spTree>
-      <p:nvGrpSpPr>
-        <p:cNvPr id="1" name=""/>
-        <p:cNvGrpSpPr/>
-        <p:nvPr/>
-      </p:nvGrpSpPr>
-      <p:grpSpPr>
-        <a:xfrm>
-          <a:off x="0" y="0"/>
-          <a:ext cx="0" cy="0"/>
-          <a:chOff x="0" y="0"/>
-          <a:chExt cx="0" cy="0"/>
-        </a:xfrm>
-      </p:grpSpPr>
-      <p:sp>
-        <p:nvSpPr>
-          <p:cNvPr id="2" name="Text 0"/>
-          <p:cNvSpPr/>
-          <p:nvPr/>
-        </p:nvSpPr>
-        <p:spPr>
-          <a:xfrm>
-            <a:off x="812800" y="812800"/>
-            <a:ext cx="10883392" cy="238720"/>
-          </a:xfrm>
-          <a:prstGeom prst="rect">
-            <a:avLst/>
-          </a:prstGeom>
-          <a:noFill/>
-          <a:ln/>
-        </p:spPr>
-        <p:txBody>
-          <a:bodyPr wrap="square" lIns="0" tIns="0" rIns="0" bIns="0" rtlCol="0" anchor="t">
-            <a:normAutofit/>
-          </a:bodyPr>
-          <a:lstStyle/>
-          <a:p>
-            <a:pPr marL="0" marR="0" lvl="0" indent="0" algn="l" defTabSz="914400" rtl="0" eaLnBrk="1" fontAlgn="auto" latinLnBrk="0" hangingPunct="1">
-              <a:lnSpc>
-                <a:spcPts val="1680"/>
-              </a:lnSpc>
-              <a:spcBef>
-                <a:spcPts val="0"/>
-              </a:spcBef>
-              <a:spcAft>
-                <a:spcPts val="0"/>
-              </a:spcAft>
-              <a:buClrTx/>
-              <a:buSzTx/>
-              <a:buFontTx/>
-              <a:buNone/>
-              <a:tabLst/>
-              <a:defRPr/>
-            </a:pPr>
-            <a:r>
-              <a:rPr kumimoji="0" lang="en-US" sz="1200" b="1" i="0" u="none" strike="noStrike" kern="0" cap="none" spc="150" normalizeH="0" baseline="0" noProof="0" dirty="0">
-                <a:ln>
-                  <a:noFill/>
-                </a:ln>
-                <a:solidFill>
-                  <a:srgbClr val="5A45D1"/>
-                </a:solidFill>
-                <a:effectLst/>
-                <a:uLnTx/>
-                <a:uFillTx/>
-                <a:latin typeface="DM Sans" pitchFamily="34" charset="0"/>
-                <a:ea typeface="DM Sans" pitchFamily="34" charset="-122"/>
-                <a:cs typeface="DM Sans" pitchFamily="34" charset="-120"/>
-              </a:rPr>
-              <a:t>CHOOSING</a:t>
-            </a:r>
-            <a:endParaRPr kumimoji="0" lang="en-US" sz="1200" b="0" i="0" u="none" strike="noStrike" kern="1200" cap="none" spc="0" normalizeH="0" baseline="0" noProof="0" dirty="0">
-              <a:ln>
-                <a:noFill/>
-              </a:ln>
-              <a:solidFill>
-                <a:srgbClr val="1D1A33"/>
-              </a:solidFill>
-              <a:effectLst/>
-              <a:uLnTx/>
-              <a:uFillTx/>
-              <a:latin typeface="DM Sans"/>
-              <a:ea typeface="+mn-ea"/>
-              <a:cs typeface="+mn-cs"/>
-            </a:endParaRPr>
-          </a:p>
-        </p:txBody>
-      </p:sp>
-      <p:sp>
-        <p:nvSpPr>
-          <p:cNvPr id="3" name="Text 1"/>
-          <p:cNvSpPr>
-            <a:spLocks noGrp="1"/>
-          </p:cNvSpPr>
-          <p:nvPr>
-            <p:ph type="title"/>
-          </p:nvPr>
-        </p:nvSpPr>
-        <p:spPr>
-          <a:xfrm>
-            <a:off x="812800" y="1102320"/>
-            <a:ext cx="10883392" cy="472430"/>
-          </a:xfrm>
-          <a:prstGeom prst="rect">
-            <a:avLst/>
-          </a:prstGeom>
-          <a:noFill/>
-          <a:ln/>
-        </p:spPr>
-        <p:txBody>
-          <a:bodyPr wrap="square" lIns="0" tIns="0" rIns="0" bIns="0" rtlCol="0" anchor="t">
-            <a:normAutofit/>
-          </a:bodyPr>
-          <a:lstStyle/>
-          <a:p>
-            <a:pPr marL="0" indent="0" algn="l">
-              <a:lnSpc>
-                <a:spcPts val="3520"/>
-              </a:lnSpc>
-              <a:buNone/>
-            </a:pPr>
-            <a:r>
-              <a:rPr lang="en-US" sz="3200" b="1" i="0" dirty="0">
-                <a:solidFill>
-                  <a:srgbClr val="1D1A33"/>
-                </a:solidFill>
-                <a:latin typeface="DM Sans" pitchFamily="34" charset="0"/>
-                <a:ea typeface="DM Sans" pitchFamily="34" charset="-122"/>
-                <a:cs typeface="DM Sans" pitchFamily="34" charset="-120"/>
-              </a:rPr>
-              <a:t>Models or prompts?</a:t>
-            </a:r>
-            <a:endParaRPr lang="en-US" sz="3200" dirty="0"/>
-          </a:p>
-        </p:txBody>
-      </p:sp>
-      <p:graphicFrame>
-        <p:nvGraphicFramePr>
-          <p:cNvPr id="4" name="Table 0"/>
-          <p:cNvGraphicFramePr>
-            <a:graphicFrameLocks noGrp="1"/>
-          </p:cNvGraphicFramePr>
-          <p:nvPr/>
-        </p:nvGraphicFramePr>
-        <p:xfrm>
-          <a:off x="825500" y="1866850"/>
-          <a:ext cx="10553700" cy="1792934"/>
-        </p:xfrm>
-        <a:graphic>
-          <a:graphicData uri="http://schemas.openxmlformats.org/drawingml/2006/table">
-            <a:tbl>
-              <a:tblPr/>
-              <a:tblGrid>
-                <a:gridCol w="1899666">
-                  <a:extLst>
-                    <a:ext uri="{9D8B030D-6E8A-4147-A177-3AD203B41FA5}">
-                      <a16:colId xmlns:a16="http://schemas.microsoft.com/office/drawing/2014/main" val="20000"/>
-                    </a:ext>
-                  </a:extLst>
-                </a:gridCol>
-                <a:gridCol w="4327017">
-                  <a:extLst>
-                    <a:ext uri="{9D8B030D-6E8A-4147-A177-3AD203B41FA5}">
-                      <a16:colId xmlns:a16="http://schemas.microsoft.com/office/drawing/2014/main" val="20001"/>
-                    </a:ext>
-                  </a:extLst>
-                </a:gridCol>
-                <a:gridCol w="4327017">
-                  <a:extLst>
-                    <a:ext uri="{9D8B030D-6E8A-4147-A177-3AD203B41FA5}">
-                      <a16:colId xmlns:a16="http://schemas.microsoft.com/office/drawing/2014/main" val="20002"/>
-                    </a:ext>
-                  </a:extLst>
-                </a:gridCol>
-              </a:tblGrid>
-              <a:tr h="386011">
-                <a:tc>
-                  <a:txBody>
-                    <a:bodyPr/>
-                    <a:lstStyle/>
-                    <a:p>
-                      <a:pPr marL="0" indent="0">
-                        <a:lnSpc>
-                          <a:spcPts val="1960"/>
-                        </a:lnSpc>
-                        <a:buNone/>
-                      </a:pPr>
-                      <a:endParaRPr lang="en-US" sz="1400" dirty="0">
-                        <a:latin typeface="DM Sans" charset="0"/>
-                        <a:ea typeface="DM Sans" charset="0"/>
-                        <a:cs typeface="DM Sans" charset="0"/>
-                      </a:endParaRPr>
-                    </a:p>
-                  </a:txBody>
-                  <a:tcPr marL="62230" marR="62230" marT="62230" marB="62230">
-                    <a:lnL w="12700" cap="flat" cmpd="sng" algn="ctr">
-                      <a:solidFill>
-                        <a:srgbClr val="C5C4BF"/>
-                      </a:solidFill>
-                      <a:prstDash val="solid"/>
-                      <a:round/>
-                      <a:headEnd type="none" w="med" len="med"/>
-                      <a:tailEnd type="none" w="med" len="med"/>
-                    </a:lnL>
-                    <a:lnR w="12700" cap="flat" cmpd="sng" algn="ctr">
-                      <a:solidFill>
-                        <a:srgbClr val="B7B5B1"/>
-                      </a:solidFill>
-                      <a:prstDash val="solid"/>
-                      <a:round/>
-                      <a:headEnd type="none" w="med" len="med"/>
-                      <a:tailEnd type="none" w="med" len="med"/>
-                    </a:lnR>
-                    <a:lnT w="12700" cap="flat" cmpd="sng" algn="ctr">
-                      <a:solidFill>
-                        <a:srgbClr val="C5C4BF"/>
-                      </a:solidFill>
-                      <a:prstDash val="solid"/>
-                      <a:round/>
-                      <a:headEnd type="none" w="med" len="med"/>
-                      <a:tailEnd type="none" w="med" len="med"/>
-                    </a:lnT>
-                    <a:lnB w="12700" cap="flat" cmpd="sng" algn="ctr">
-                      <a:solidFill>
-                        <a:srgbClr val="B7B5B1"/>
-                      </a:solidFill>
-                      <a:prstDash val="solid"/>
-                      <a:round/>
-                      <a:headEnd type="none" w="med" len="med"/>
-                      <a:tailEnd type="none" w="med" len="med"/>
-                    </a:lnB>
-                    <a:solidFill>
-                      <a:srgbClr val="E5E3DD"/>
-                    </a:solidFill>
-                  </a:tcPr>
-                </a:tc>
-                <a:tc>
-                  <a:txBody>
-                    <a:bodyPr/>
-                    <a:lstStyle/>
-                    <a:p>
-                      <a:pPr marL="0" indent="0">
-                        <a:lnSpc>
-                          <a:spcPts val="1960"/>
-                        </a:lnSpc>
-                        <a:buNone/>
-                      </a:pPr>
-                      <a:r>
-                        <a:rPr lang="en-US" sz="1400" b="1" dirty="0">
-                          <a:solidFill>
-                            <a:srgbClr val="1D1A33"/>
-                          </a:solidFill>
-                          <a:latin typeface="DM Sans" pitchFamily="34" charset="0"/>
-                          <a:ea typeface="DM Sans" pitchFamily="34" charset="-122"/>
-                          <a:cs typeface="DM Sans" pitchFamily="34" charset="-120"/>
-                        </a:rPr>
-                        <a:t>Prebuilt and custom models</a:t>
-                      </a:r>
-                      <a:endParaRPr lang="en-US" sz="1400" dirty="0">
-                        <a:latin typeface="DM Sans" charset="0"/>
-                        <a:ea typeface="DM Sans" charset="0"/>
-                        <a:cs typeface="DM Sans" charset="0"/>
-                      </a:endParaRPr>
-                    </a:p>
-                  </a:txBody>
-                  <a:tcPr marL="62230" marR="62230" marT="62230" marB="62230">
-                    <a:lnL w="12700" cap="flat" cmpd="sng" algn="ctr">
-                      <a:solidFill>
-                        <a:srgbClr val="B7B5B1"/>
-                      </a:solidFill>
-                      <a:prstDash val="solid"/>
-                      <a:round/>
-                      <a:headEnd type="none" w="med" len="med"/>
-                      <a:tailEnd type="none" w="med" len="med"/>
-                    </a:lnL>
-                    <a:lnR w="12700" cap="flat" cmpd="sng" algn="ctr">
-                      <a:solidFill>
-                        <a:srgbClr val="B7B5B1"/>
-                      </a:solidFill>
-                      <a:prstDash val="solid"/>
-                      <a:round/>
-                      <a:headEnd type="none" w="med" len="med"/>
-                      <a:tailEnd type="none" w="med" len="med"/>
-                    </a:lnR>
-                    <a:lnT w="12700" cap="flat" cmpd="sng" algn="ctr">
-                      <a:solidFill>
-                        <a:srgbClr val="C5C4BF"/>
-                      </a:solidFill>
-                      <a:prstDash val="solid"/>
-                      <a:round/>
-                      <a:headEnd type="none" w="med" len="med"/>
-                      <a:tailEnd type="none" w="med" len="med"/>
-                    </a:lnT>
-                    <a:lnB w="12700" cap="flat" cmpd="sng" algn="ctr">
-                      <a:solidFill>
-                        <a:srgbClr val="B7B5B1"/>
-                      </a:solidFill>
-                      <a:prstDash val="solid"/>
-                      <a:round/>
-                      <a:headEnd type="none" w="med" len="med"/>
-                      <a:tailEnd type="none" w="med" len="med"/>
-                    </a:lnB>
-                    <a:solidFill>
-                      <a:srgbClr val="E5E3DD"/>
-                    </a:solidFill>
-                  </a:tcPr>
-                </a:tc>
-                <a:tc>
-                  <a:txBody>
-                    <a:bodyPr/>
-                    <a:lstStyle/>
-                    <a:p>
-                      <a:pPr marL="0" indent="0">
-                        <a:lnSpc>
-                          <a:spcPts val="1960"/>
-                        </a:lnSpc>
-                        <a:buNone/>
-                      </a:pPr>
-                      <a:r>
-                        <a:rPr lang="en-US" sz="1400" b="1" dirty="0">
-                          <a:solidFill>
-                            <a:srgbClr val="1D1A33"/>
-                          </a:solidFill>
-                          <a:latin typeface="DM Sans" pitchFamily="34" charset="0"/>
-                          <a:ea typeface="DM Sans" pitchFamily="34" charset="-122"/>
-                          <a:cs typeface="DM Sans" pitchFamily="34" charset="-120"/>
-                        </a:rPr>
-                        <a:t>Prompts</a:t>
-                      </a:r>
-                      <a:endParaRPr lang="en-US" sz="1400" dirty="0">
-                        <a:latin typeface="DM Sans" charset="0"/>
-                        <a:ea typeface="DM Sans" charset="0"/>
-                        <a:cs typeface="DM Sans" charset="0"/>
-                      </a:endParaRPr>
-                    </a:p>
-                  </a:txBody>
-                  <a:tcPr marL="62230" marR="62230" marT="62230" marB="62230">
-                    <a:lnL w="12700" cap="flat" cmpd="sng" algn="ctr">
-                      <a:solidFill>
-                        <a:srgbClr val="B7B5B1"/>
-                      </a:solidFill>
-                      <a:prstDash val="solid"/>
-                      <a:round/>
-                      <a:headEnd type="none" w="med" len="med"/>
-                      <a:tailEnd type="none" w="med" len="med"/>
-                    </a:lnL>
-                    <a:lnR w="12700" cap="flat" cmpd="sng" algn="ctr">
-                      <a:solidFill>
-                        <a:srgbClr val="B7B5B1"/>
-                      </a:solidFill>
-                      <a:prstDash val="solid"/>
-                      <a:round/>
-                      <a:headEnd type="none" w="med" len="med"/>
-                      <a:tailEnd type="none" w="med" len="med"/>
-                    </a:lnR>
-                    <a:lnT w="12700" cap="flat" cmpd="sng" algn="ctr">
-                      <a:solidFill>
-                        <a:srgbClr val="C5C4BF"/>
-                      </a:solidFill>
-                      <a:prstDash val="solid"/>
-                      <a:round/>
-                      <a:headEnd type="none" w="med" len="med"/>
-                      <a:tailEnd type="none" w="med" len="med"/>
-                    </a:lnT>
-                    <a:lnB w="12700" cap="flat" cmpd="sng" algn="ctr">
-                      <a:solidFill>
-                        <a:srgbClr val="B7B5B1"/>
-                      </a:solidFill>
-                      <a:prstDash val="solid"/>
-                      <a:round/>
-                      <a:headEnd type="none" w="med" len="med"/>
-                      <a:tailEnd type="none" w="med" len="med"/>
-                    </a:lnB>
-                    <a:solidFill>
-                      <a:srgbClr val="E5E3DD"/>
-                    </a:solidFill>
-                  </a:tcPr>
-                </a:tc>
-                <a:extLst>
-                  <a:ext uri="{0D108BD9-81ED-4DB2-BD59-A6C34878D82A}">
-                    <a16:rowId xmlns:a16="http://schemas.microsoft.com/office/drawing/2014/main" val="10000"/>
-                  </a:ext>
-                </a:extLst>
-              </a:tr>
-              <a:tr h="386011">
-                <a:tc>
-                  <a:txBody>
-                    <a:bodyPr/>
-                    <a:lstStyle/>
-                    <a:p>
-                      <a:pPr marL="0" indent="0">
-                        <a:lnSpc>
-                          <a:spcPts val="1960"/>
-                        </a:lnSpc>
-                        <a:buNone/>
-                      </a:pPr>
-                      <a:r>
-                        <a:rPr lang="en-US" sz="1400" dirty="0">
-                          <a:solidFill>
-                            <a:srgbClr val="1D1A33"/>
-                          </a:solidFill>
-                          <a:latin typeface="DM Sans" pitchFamily="34" charset="0"/>
-                          <a:ea typeface="DM Sans" pitchFamily="34" charset="-122"/>
-                          <a:cs typeface="DM Sans" pitchFamily="34" charset="-120"/>
-                        </a:rPr>
-                        <a:t>Setup</a:t>
-                      </a:r>
-                      <a:endParaRPr lang="en-US" sz="1400" dirty="0">
-                        <a:latin typeface="DM Sans" charset="0"/>
-                        <a:ea typeface="DM Sans" charset="0"/>
-                        <a:cs typeface="DM Sans" charset="0"/>
-                      </a:endParaRPr>
-                    </a:p>
-                  </a:txBody>
-                  <a:tcPr marL="62230" marR="62230" marT="62230" marB="62230">
-                    <a:lnL w="12700" cap="flat" cmpd="sng" algn="ctr">
-                      <a:solidFill>
-                        <a:srgbClr val="C5C4BF"/>
-                      </a:solidFill>
-                      <a:prstDash val="solid"/>
-                      <a:round/>
-                      <a:headEnd type="none" w="med" len="med"/>
-                      <a:tailEnd type="none" w="med" len="med"/>
-                    </a:lnL>
-                    <a:lnR w="12700" cap="flat" cmpd="sng" algn="ctr">
-                      <a:solidFill>
-                        <a:srgbClr val="C5C4BF"/>
-                      </a:solidFill>
-                      <a:prstDash val="solid"/>
-                      <a:round/>
-                      <a:headEnd type="none" w="med" len="med"/>
-                      <a:tailEnd type="none" w="med" len="med"/>
-                    </a:lnR>
-                    <a:lnT w="12700" cap="flat" cmpd="sng" algn="ctr">
-                      <a:solidFill>
-                        <a:srgbClr val="B7B5B1"/>
-                      </a:solidFill>
-                      <a:prstDash val="solid"/>
-                      <a:round/>
-                      <a:headEnd type="none" w="med" len="med"/>
-                      <a:tailEnd type="none" w="med" len="med"/>
-                    </a:lnT>
-                    <a:lnB w="12700" cap="flat" cmpd="sng" algn="ctr">
-                      <a:solidFill>
-                        <a:srgbClr val="C5C4BF"/>
-                      </a:solidFill>
-                      <a:prstDash val="solid"/>
-                      <a:round/>
-                      <a:headEnd type="none" w="med" len="med"/>
-                      <a:tailEnd type="none" w="med" len="med"/>
-                    </a:lnB>
-                  </a:tcPr>
-                </a:tc>
-                <a:tc>
-                  <a:txBody>
-                    <a:bodyPr/>
-                    <a:lstStyle/>
-                    <a:p>
-                      <a:pPr marL="0" indent="0">
-                        <a:lnSpc>
-                          <a:spcPts val="1960"/>
-                        </a:lnSpc>
-                        <a:buNone/>
-                      </a:pPr>
-                      <a:r>
-                        <a:rPr lang="en-US" sz="1400" dirty="0">
-                          <a:solidFill>
-                            <a:srgbClr val="1D1A33"/>
-                          </a:solidFill>
-                          <a:latin typeface="DM Sans" pitchFamily="34" charset="0"/>
-                          <a:ea typeface="DM Sans" pitchFamily="34" charset="-122"/>
-                          <a:cs typeface="DM Sans" pitchFamily="34" charset="-120"/>
-                        </a:rPr>
-                        <a:t>Use prebuilt as is, or train on your data</a:t>
-                      </a:r>
-                      <a:endParaRPr lang="en-US" sz="1400" dirty="0">
-                        <a:latin typeface="DM Sans" charset="0"/>
-                        <a:ea typeface="DM Sans" charset="0"/>
-                        <a:cs typeface="DM Sans" charset="0"/>
-                      </a:endParaRPr>
-                    </a:p>
-                  </a:txBody>
-                  <a:tcPr marL="62230" marR="62230" marT="62230" marB="62230">
-                    <a:lnL w="12700" cap="flat" cmpd="sng" algn="ctr">
-                      <a:solidFill>
-                        <a:srgbClr val="C5C4BF"/>
-                      </a:solidFill>
-                      <a:prstDash val="solid"/>
-                      <a:round/>
-                      <a:headEnd type="none" w="med" len="med"/>
-                      <a:tailEnd type="none" w="med" len="med"/>
-                    </a:lnL>
-                    <a:lnR w="12700" cap="flat" cmpd="sng" algn="ctr">
-                      <a:solidFill>
-                        <a:srgbClr val="C5C4BF"/>
-                      </a:solidFill>
-                      <a:prstDash val="solid"/>
-                      <a:round/>
-                      <a:headEnd type="none" w="med" len="med"/>
-                      <a:tailEnd type="none" w="med" len="med"/>
-                    </a:lnR>
-                    <a:lnT w="12700" cap="flat" cmpd="sng" algn="ctr">
-                      <a:solidFill>
-                        <a:srgbClr val="B7B5B1"/>
-                      </a:solidFill>
-                      <a:prstDash val="solid"/>
-                      <a:round/>
-                      <a:headEnd type="none" w="med" len="med"/>
-                      <a:tailEnd type="none" w="med" len="med"/>
-                    </a:lnT>
-                    <a:lnB w="12700" cap="flat" cmpd="sng" algn="ctr">
-                      <a:solidFill>
-                        <a:srgbClr val="C5C4BF"/>
-                      </a:solidFill>
-                      <a:prstDash val="solid"/>
-                      <a:round/>
-                      <a:headEnd type="none" w="med" len="med"/>
-                      <a:tailEnd type="none" w="med" len="med"/>
-                    </a:lnB>
-                  </a:tcPr>
-                </a:tc>
-                <a:tc>
-                  <a:txBody>
-                    <a:bodyPr/>
-                    <a:lstStyle/>
-                    <a:p>
-                      <a:pPr marL="0" indent="0">
-                        <a:lnSpc>
-                          <a:spcPts val="1960"/>
-                        </a:lnSpc>
-                        <a:buNone/>
-                      </a:pPr>
-                      <a:r>
-                        <a:rPr lang="en-US" sz="1400" dirty="0">
-                          <a:solidFill>
-                            <a:srgbClr val="1D1A33"/>
-                          </a:solidFill>
-                          <a:latin typeface="DM Sans" pitchFamily="34" charset="0"/>
-                          <a:ea typeface="DM Sans" pitchFamily="34" charset="-122"/>
-                          <a:cs typeface="DM Sans" pitchFamily="34" charset="-120"/>
-                        </a:rPr>
-                        <a:t>Write plain-language instructions, no training</a:t>
-                      </a:r>
-                      <a:endParaRPr lang="en-US" sz="1400" dirty="0">
-                        <a:latin typeface="DM Sans" charset="0"/>
-                        <a:ea typeface="DM Sans" charset="0"/>
-                        <a:cs typeface="DM Sans" charset="0"/>
-                      </a:endParaRPr>
-                    </a:p>
-                  </a:txBody>
-                  <a:tcPr marL="62230" marR="62230" marT="62230" marB="62230">
-                    <a:lnL w="12700" cap="flat" cmpd="sng" algn="ctr">
-                      <a:solidFill>
-                        <a:srgbClr val="C5C4BF"/>
-                      </a:solidFill>
-                      <a:prstDash val="solid"/>
-                      <a:round/>
-                      <a:headEnd type="none" w="med" len="med"/>
-                      <a:tailEnd type="none" w="med" len="med"/>
-                    </a:lnL>
-                    <a:lnR w="12700" cap="flat" cmpd="sng" algn="ctr">
-                      <a:solidFill>
-                        <a:srgbClr val="C5C4BF"/>
-                      </a:solidFill>
-                      <a:prstDash val="solid"/>
-                      <a:round/>
-                      <a:headEnd type="none" w="med" len="med"/>
-                      <a:tailEnd type="none" w="med" len="med"/>
-                    </a:lnR>
-                    <a:lnT w="12700" cap="flat" cmpd="sng" algn="ctr">
-                      <a:solidFill>
-                        <a:srgbClr val="B7B5B1"/>
-                      </a:solidFill>
-                      <a:prstDash val="solid"/>
-                      <a:round/>
-                      <a:headEnd type="none" w="med" len="med"/>
-                      <a:tailEnd type="none" w="med" len="med"/>
-                    </a:lnT>
-                    <a:lnB w="12700" cap="flat" cmpd="sng" algn="ctr">
-                      <a:solidFill>
-                        <a:srgbClr val="C5C4BF"/>
-                      </a:solidFill>
-                      <a:prstDash val="solid"/>
-                      <a:round/>
-                      <a:headEnd type="none" w="med" len="med"/>
-                      <a:tailEnd type="none" w="med" len="med"/>
-                    </a:lnB>
-                  </a:tcPr>
-                </a:tc>
-                <a:extLst>
-                  <a:ext uri="{0D108BD9-81ED-4DB2-BD59-A6C34878D82A}">
-                    <a16:rowId xmlns:a16="http://schemas.microsoft.com/office/drawing/2014/main" val="10001"/>
-                  </a:ext>
-                </a:extLst>
-              </a:tr>
-              <a:tr h="634901">
-                <a:tc>
-                  <a:txBody>
-                    <a:bodyPr/>
-                    <a:lstStyle/>
-                    <a:p>
-                      <a:pPr marL="0" indent="0">
-                        <a:lnSpc>
-                          <a:spcPts val="1960"/>
-                        </a:lnSpc>
-                        <a:buNone/>
-                      </a:pPr>
-                      <a:r>
-                        <a:rPr lang="en-US" sz="1400" dirty="0">
-                          <a:solidFill>
-                            <a:srgbClr val="1D1A33"/>
-                          </a:solidFill>
-                          <a:latin typeface="DM Sans" pitchFamily="34" charset="0"/>
-                          <a:ea typeface="DM Sans" pitchFamily="34" charset="-122"/>
-                          <a:cs typeface="DM Sans" pitchFamily="34" charset="-120"/>
-                        </a:rPr>
-                        <a:t>Best for</a:t>
-                      </a:r>
-                      <a:endParaRPr lang="en-US" sz="1400" dirty="0">
-                        <a:latin typeface="DM Sans" charset="0"/>
-                        <a:ea typeface="DM Sans" charset="0"/>
-                        <a:cs typeface="DM Sans" charset="0"/>
-                      </a:endParaRPr>
-                    </a:p>
-                  </a:txBody>
-                  <a:tcPr marL="62230" marR="62230" marT="62230" marB="62230">
-                    <a:lnL w="12700" cap="flat" cmpd="sng" algn="ctr">
-                      <a:solidFill>
-                        <a:srgbClr val="C5C4BF"/>
-                      </a:solidFill>
-                      <a:prstDash val="solid"/>
-                      <a:round/>
-                      <a:headEnd type="none" w="med" len="med"/>
-                      <a:tailEnd type="none" w="med" len="med"/>
-                    </a:lnL>
-                    <a:lnR w="12700" cap="flat" cmpd="sng" algn="ctr">
-                      <a:solidFill>
-                        <a:srgbClr val="C5C4BF"/>
-                      </a:solidFill>
-                      <a:prstDash val="solid"/>
-                      <a:round/>
-                      <a:headEnd type="none" w="med" len="med"/>
-                      <a:tailEnd type="none" w="med" len="med"/>
-                    </a:lnR>
-                    <a:lnT w="12700" cap="flat" cmpd="sng" algn="ctr">
-                      <a:solidFill>
-                        <a:srgbClr val="C5C4BF"/>
-                      </a:solidFill>
-                      <a:prstDash val="solid"/>
-                      <a:round/>
-                      <a:headEnd type="none" w="med" len="med"/>
-                      <a:tailEnd type="none" w="med" len="med"/>
-                    </a:lnT>
-                    <a:lnB w="12700" cap="flat" cmpd="sng" algn="ctr">
-                      <a:solidFill>
-                        <a:srgbClr val="C5C4BF"/>
-                      </a:solidFill>
-                      <a:prstDash val="solid"/>
-                      <a:round/>
-                      <a:headEnd type="none" w="med" len="med"/>
-                      <a:tailEnd type="none" w="med" len="med"/>
-                    </a:lnB>
-                  </a:tcPr>
-                </a:tc>
-                <a:tc>
-                  <a:txBody>
-                    <a:bodyPr/>
-                    <a:lstStyle/>
-                    <a:p>
-                      <a:pPr marL="0" indent="0">
-                        <a:lnSpc>
-                          <a:spcPts val="1960"/>
-                        </a:lnSpc>
-                        <a:buNone/>
-                      </a:pPr>
-                      <a:r>
-                        <a:rPr lang="en-US" sz="1400" dirty="0">
-                          <a:solidFill>
-                            <a:srgbClr val="1D1A33"/>
-                          </a:solidFill>
-                          <a:latin typeface="DM Sans" pitchFamily="34" charset="0"/>
-                          <a:ea typeface="DM Sans" pitchFamily="34" charset="-122"/>
-                          <a:cs typeface="DM Sans" pitchFamily="34" charset="-120"/>
-                        </a:rPr>
-                        <a:t>Production work that needs accuracy and repeatability, such as invoices</a:t>
-                      </a:r>
-                      <a:endParaRPr lang="en-US" sz="1400" dirty="0">
-                        <a:latin typeface="DM Sans" charset="0"/>
-                        <a:ea typeface="DM Sans" charset="0"/>
-                        <a:cs typeface="DM Sans" charset="0"/>
-                      </a:endParaRPr>
-                    </a:p>
-                  </a:txBody>
-                  <a:tcPr marL="62230" marR="62230" marT="62230" marB="62230">
-                    <a:lnL w="12700" cap="flat" cmpd="sng" algn="ctr">
-                      <a:solidFill>
-                        <a:srgbClr val="C5C4BF"/>
-                      </a:solidFill>
-                      <a:prstDash val="solid"/>
-                      <a:round/>
-                      <a:headEnd type="none" w="med" len="med"/>
-                      <a:tailEnd type="none" w="med" len="med"/>
-                    </a:lnL>
-                    <a:lnR w="12700" cap="flat" cmpd="sng" algn="ctr">
-                      <a:solidFill>
-                        <a:srgbClr val="C5C4BF"/>
-                      </a:solidFill>
-                      <a:prstDash val="solid"/>
-                      <a:round/>
-                      <a:headEnd type="none" w="med" len="med"/>
-                      <a:tailEnd type="none" w="med" len="med"/>
-                    </a:lnR>
-                    <a:lnT w="12700" cap="flat" cmpd="sng" algn="ctr">
-                      <a:solidFill>
-                        <a:srgbClr val="C5C4BF"/>
-                      </a:solidFill>
-                      <a:prstDash val="solid"/>
-                      <a:round/>
-                      <a:headEnd type="none" w="med" len="med"/>
-                      <a:tailEnd type="none" w="med" len="med"/>
-                    </a:lnT>
-                    <a:lnB w="12700" cap="flat" cmpd="sng" algn="ctr">
-                      <a:solidFill>
-                        <a:srgbClr val="C5C4BF"/>
-                      </a:solidFill>
-                      <a:prstDash val="solid"/>
-                      <a:round/>
-                      <a:headEnd type="none" w="med" len="med"/>
-                      <a:tailEnd type="none" w="med" len="med"/>
-                    </a:lnB>
-                  </a:tcPr>
-                </a:tc>
-                <a:tc>
-                  <a:txBody>
-                    <a:bodyPr/>
-                    <a:lstStyle/>
-                    <a:p>
-                      <a:pPr marL="0" indent="0">
-                        <a:lnSpc>
-                          <a:spcPts val="1960"/>
-                        </a:lnSpc>
-                        <a:buNone/>
-                      </a:pPr>
-                      <a:r>
-                        <a:rPr lang="en-US" sz="1400" dirty="0">
-                          <a:solidFill>
-                            <a:srgbClr val="1D1A33"/>
-                          </a:solidFill>
-                          <a:latin typeface="DM Sans" pitchFamily="34" charset="0"/>
-                          <a:ea typeface="DM Sans" pitchFamily="34" charset="-122"/>
-                          <a:cs typeface="DM Sans" pitchFamily="34" charset="-120"/>
-                        </a:rPr>
-                        <a:t>Flexible tasks such as extraction, summaries and drafting</a:t>
-                      </a:r>
-                      <a:endParaRPr lang="en-US" sz="1400" dirty="0">
-                        <a:latin typeface="DM Sans" charset="0"/>
-                        <a:ea typeface="DM Sans" charset="0"/>
-                        <a:cs typeface="DM Sans" charset="0"/>
-                      </a:endParaRPr>
-                    </a:p>
-                  </a:txBody>
-                  <a:tcPr marL="62230" marR="62230" marT="62230" marB="62230">
-                    <a:lnL w="12700" cap="flat" cmpd="sng" algn="ctr">
-                      <a:solidFill>
-                        <a:srgbClr val="C5C4BF"/>
-                      </a:solidFill>
-                      <a:prstDash val="solid"/>
-                      <a:round/>
-                      <a:headEnd type="none" w="med" len="med"/>
-                      <a:tailEnd type="none" w="med" len="med"/>
-                    </a:lnL>
-                    <a:lnR w="12700" cap="flat" cmpd="sng" algn="ctr">
-                      <a:solidFill>
-                        <a:srgbClr val="C5C4BF"/>
-                      </a:solidFill>
-                      <a:prstDash val="solid"/>
-                      <a:round/>
-                      <a:headEnd type="none" w="med" len="med"/>
-                      <a:tailEnd type="none" w="med" len="med"/>
-                    </a:lnR>
-                    <a:lnT w="12700" cap="flat" cmpd="sng" algn="ctr">
-                      <a:solidFill>
-                        <a:srgbClr val="C5C4BF"/>
-                      </a:solidFill>
-                      <a:prstDash val="solid"/>
-                      <a:round/>
-                      <a:headEnd type="none" w="med" len="med"/>
-                      <a:tailEnd type="none" w="med" len="med"/>
-                    </a:lnT>
-                    <a:lnB w="12700" cap="flat" cmpd="sng" algn="ctr">
-                      <a:solidFill>
-                        <a:srgbClr val="C5C4BF"/>
-                      </a:solidFill>
-                      <a:prstDash val="solid"/>
-                      <a:round/>
-                      <a:headEnd type="none" w="med" len="med"/>
-                      <a:tailEnd type="none" w="med" len="med"/>
-                    </a:lnB>
-                  </a:tcPr>
-                </a:tc>
-                <a:extLst>
-                  <a:ext uri="{0D108BD9-81ED-4DB2-BD59-A6C34878D82A}">
-                    <a16:rowId xmlns:a16="http://schemas.microsoft.com/office/drawing/2014/main" val="10002"/>
-                  </a:ext>
-                </a:extLst>
-              </a:tr>
-              <a:tr h="386011">
-                <a:tc>
-                  <a:txBody>
-                    <a:bodyPr/>
-                    <a:lstStyle/>
-                    <a:p>
-                      <a:pPr marL="0" indent="0">
-                        <a:lnSpc>
-                          <a:spcPts val="1960"/>
-                        </a:lnSpc>
-                        <a:buNone/>
-                      </a:pPr>
-                      <a:r>
-                        <a:rPr lang="en-US" sz="1400" dirty="0">
-                          <a:solidFill>
-                            <a:srgbClr val="1D1A33"/>
-                          </a:solidFill>
-                          <a:latin typeface="DM Sans" pitchFamily="34" charset="0"/>
-                          <a:ea typeface="DM Sans" pitchFamily="34" charset="-122"/>
-                          <a:cs typeface="DM Sans" pitchFamily="34" charset="-120"/>
-                        </a:rPr>
-                        <a:t>Watch for</a:t>
-                      </a:r>
-                      <a:endParaRPr lang="en-US" sz="1400" dirty="0">
-                        <a:latin typeface="DM Sans" charset="0"/>
-                        <a:ea typeface="DM Sans" charset="0"/>
-                        <a:cs typeface="DM Sans" charset="0"/>
-                      </a:endParaRPr>
-                    </a:p>
-                  </a:txBody>
-                  <a:tcPr marL="62230" marR="62230" marT="62230" marB="62230">
-                    <a:lnL w="12700" cap="flat" cmpd="sng" algn="ctr">
-                      <a:solidFill>
-                        <a:srgbClr val="C5C4BF"/>
-                      </a:solidFill>
-                      <a:prstDash val="solid"/>
-                      <a:round/>
-                      <a:headEnd type="none" w="med" len="med"/>
-                      <a:tailEnd type="none" w="med" len="med"/>
-                    </a:lnL>
-                    <a:lnR w="12700" cap="flat" cmpd="sng" algn="ctr">
-                      <a:solidFill>
-                        <a:srgbClr val="C5C4BF"/>
-                      </a:solidFill>
-                      <a:prstDash val="solid"/>
-                      <a:round/>
-                      <a:headEnd type="none" w="med" len="med"/>
-                      <a:tailEnd type="none" w="med" len="med"/>
-                    </a:lnR>
-                    <a:lnT w="12700" cap="flat" cmpd="sng" algn="ctr">
-                      <a:solidFill>
-                        <a:srgbClr val="C5C4BF"/>
-                      </a:solidFill>
-                      <a:prstDash val="solid"/>
-                      <a:round/>
-                      <a:headEnd type="none" w="med" len="med"/>
-                      <a:tailEnd type="none" w="med" len="med"/>
-                    </a:lnT>
-                    <a:lnB w="12700" cap="flat" cmpd="sng" algn="ctr">
-                      <a:solidFill>
-                        <a:srgbClr val="C5C4BF"/>
-                      </a:solidFill>
-                      <a:prstDash val="solid"/>
-                      <a:round/>
-                      <a:headEnd type="none" w="med" len="med"/>
-                      <a:tailEnd type="none" w="med" len="med"/>
-                    </a:lnB>
-                  </a:tcPr>
-                </a:tc>
-                <a:tc>
-                  <a:txBody>
-                    <a:bodyPr/>
-                    <a:lstStyle/>
-                    <a:p>
-                      <a:pPr marL="0" indent="0">
-                        <a:lnSpc>
-                          <a:spcPts val="1960"/>
-                        </a:lnSpc>
-                        <a:buNone/>
-                      </a:pPr>
-                      <a:r>
-                        <a:rPr lang="en-US" sz="1400" dirty="0">
-                          <a:solidFill>
-                            <a:srgbClr val="1D1A33"/>
-                          </a:solidFill>
-                          <a:latin typeface="DM Sans" pitchFamily="34" charset="0"/>
-                          <a:ea typeface="DM Sans" pitchFamily="34" charset="-122"/>
-                          <a:cs typeface="DM Sans" pitchFamily="34" charset="-120"/>
-                        </a:rPr>
-                        <a:t>Training data and effort for custom models</a:t>
-                      </a:r>
-                      <a:endParaRPr lang="en-US" sz="1400" dirty="0">
-                        <a:latin typeface="DM Sans" charset="0"/>
-                        <a:ea typeface="DM Sans" charset="0"/>
-                        <a:cs typeface="DM Sans" charset="0"/>
-                      </a:endParaRPr>
-                    </a:p>
-                  </a:txBody>
-                  <a:tcPr marL="62230" marR="62230" marT="62230" marB="62230">
-                    <a:lnL w="12700" cap="flat" cmpd="sng" algn="ctr">
-                      <a:solidFill>
-                        <a:srgbClr val="C5C4BF"/>
-                      </a:solidFill>
-                      <a:prstDash val="solid"/>
-                      <a:round/>
-                      <a:headEnd type="none" w="med" len="med"/>
-                      <a:tailEnd type="none" w="med" len="med"/>
-                    </a:lnL>
-                    <a:lnR w="12700" cap="flat" cmpd="sng" algn="ctr">
-                      <a:solidFill>
-                        <a:srgbClr val="C5C4BF"/>
-                      </a:solidFill>
-                      <a:prstDash val="solid"/>
-                      <a:round/>
-                      <a:headEnd type="none" w="med" len="med"/>
-                      <a:tailEnd type="none" w="med" len="med"/>
-                    </a:lnR>
-                    <a:lnT w="12700" cap="flat" cmpd="sng" algn="ctr">
-                      <a:solidFill>
-                        <a:srgbClr val="C5C4BF"/>
-                      </a:solidFill>
-                      <a:prstDash val="solid"/>
-                      <a:round/>
-                      <a:headEnd type="none" w="med" len="med"/>
-                      <a:tailEnd type="none" w="med" len="med"/>
-                    </a:lnT>
-                    <a:lnB w="12700" cap="flat" cmpd="sng" algn="ctr">
-                      <a:solidFill>
-                        <a:srgbClr val="C5C4BF"/>
-                      </a:solidFill>
-                      <a:prstDash val="solid"/>
-                      <a:round/>
-                      <a:headEnd type="none" w="med" len="med"/>
-                      <a:tailEnd type="none" w="med" len="med"/>
-                    </a:lnB>
-                  </a:tcPr>
-                </a:tc>
-                <a:tc>
-                  <a:txBody>
-                    <a:bodyPr/>
-                    <a:lstStyle/>
-                    <a:p>
-                      <a:pPr marL="0" indent="0">
-                        <a:lnSpc>
-                          <a:spcPts val="1960"/>
-                        </a:lnSpc>
-                        <a:buNone/>
-                      </a:pPr>
-                      <a:r>
-                        <a:rPr lang="en-US" sz="1400" dirty="0">
-                          <a:solidFill>
-                            <a:srgbClr val="1D1A33"/>
-                          </a:solidFill>
-                          <a:latin typeface="DM Sans" pitchFamily="34" charset="0"/>
-                          <a:ea typeface="DM Sans" pitchFamily="34" charset="-122"/>
-                          <a:cs typeface="DM Sans" pitchFamily="34" charset="-120"/>
-                        </a:rPr>
-                        <a:t>Variable output, so add examples and validate</a:t>
-                      </a:r>
-                      <a:endParaRPr lang="en-US" sz="1400" dirty="0">
-                        <a:latin typeface="DM Sans" charset="0"/>
-                        <a:ea typeface="DM Sans" charset="0"/>
-                        <a:cs typeface="DM Sans" charset="0"/>
-                      </a:endParaRPr>
-                    </a:p>
-                  </a:txBody>
-                  <a:tcPr marL="62230" marR="62230" marT="62230" marB="62230">
-                    <a:lnL w="12700" cap="flat" cmpd="sng" algn="ctr">
-                      <a:solidFill>
-                        <a:srgbClr val="C5C4BF"/>
-                      </a:solidFill>
-                      <a:prstDash val="solid"/>
-                      <a:round/>
-                      <a:headEnd type="none" w="med" len="med"/>
-                      <a:tailEnd type="none" w="med" len="med"/>
-                    </a:lnL>
-                    <a:lnR w="12700" cap="flat" cmpd="sng" algn="ctr">
-                      <a:solidFill>
-                        <a:srgbClr val="C5C4BF"/>
-                      </a:solidFill>
-                      <a:prstDash val="solid"/>
-                      <a:round/>
-                      <a:headEnd type="none" w="med" len="med"/>
-                      <a:tailEnd type="none" w="med" len="med"/>
-                    </a:lnR>
-                    <a:lnT w="12700" cap="flat" cmpd="sng" algn="ctr">
-                      <a:solidFill>
-                        <a:srgbClr val="C5C4BF"/>
-                      </a:solidFill>
-                      <a:prstDash val="solid"/>
-                      <a:round/>
-                      <a:headEnd type="none" w="med" len="med"/>
-                      <a:tailEnd type="none" w="med" len="med"/>
-                    </a:lnT>
-                    <a:lnB w="12700" cap="flat" cmpd="sng" algn="ctr">
-                      <a:solidFill>
-                        <a:srgbClr val="C5C4BF"/>
-                      </a:solidFill>
-                      <a:prstDash val="solid"/>
-                      <a:round/>
-                      <a:headEnd type="none" w="med" len="med"/>
-                      <a:tailEnd type="none" w="med" len="med"/>
-                    </a:lnB>
-                  </a:tcPr>
-                </a:tc>
-                <a:extLst>
-                  <a:ext uri="{0D108BD9-81ED-4DB2-BD59-A6C34878D82A}">
-                    <a16:rowId xmlns:a16="http://schemas.microsoft.com/office/drawing/2014/main" val="10003"/>
-                  </a:ext>
-                </a:extLst>
-              </a:tr>
-            </a:tbl>
-          </a:graphicData>
-        </a:graphic>
-      </p:graphicFrame>
     </p:spTree>
   </p:cSld>
   <p:clrMapOvr>
